--- a/media/week_10/diagrams.pptx
+++ b/media/week_10/diagrams.pptx
@@ -8,6 +8,7 @@
     <p:sldId id="256" r:id="rId2"/>
     <p:sldId id="257" r:id="rId3"/>
     <p:sldId id="258" r:id="rId4"/>
+    <p:sldId id="259" r:id="rId5"/>
   </p:sldIdLst>
   <p:sldSz cx="12192000" cy="6858000"/>
   <p:notesSz cx="6858000" cy="9144000"/>
@@ -117,7 +118,7 @@
 <file path=ppt/revisionInfo.xml><?xml version="1.0" encoding="utf-8"?>
 <p1510:revInfo xmlns:a="http://schemas.openxmlformats.org/drawingml/2006/main" xmlns:r="http://schemas.openxmlformats.org/officeDocument/2006/relationships" xmlns:p1510="http://schemas.microsoft.com/office/powerpoint/2015/10/main">
   <p1510:revLst>
-    <p1510:client id="{DA2B79C2-931E-6F45-97CE-51EECBC9C8D0}" v="43" dt="2025-11-25T22:44:02.682"/>
+    <p1510:client id="{5933DC6B-D65A-0540-81A5-FA92895F50AE}" v="1" dt="2026-10-02T09:52:17.303"/>
   </p1510:revLst>
 </p1510:revInfo>
 </file>
@@ -125,912 +126,50 @@
 <file path=ppt/changesInfos/changesInfo1.xml><?xml version="1.0" encoding="utf-8"?>
 <pc:chgInfo xmlns:a="http://schemas.openxmlformats.org/drawingml/2006/main" xmlns:r="http://schemas.openxmlformats.org/officeDocument/2006/relationships" xmlns:ac="http://schemas.microsoft.com/office/drawing/2013/main/command" xmlns:pc="http://schemas.microsoft.com/office/powerpoint/2013/main/command">
   <pc:docChgLst>
-    <pc:chgData name="Hemma Philamore" userId="db50e2f3-17b2-4cc0-b719-fb6254d3e9df" providerId="ADAL" clId="{B5D85944-D90A-5912-90C6-4C26E424D3D6}"/>
-    <pc:docChg chg="addSld modSld">
-      <pc:chgData name="Hemma Philamore" userId="db50e2f3-17b2-4cc0-b719-fb6254d3e9df" providerId="ADAL" clId="{B5D85944-D90A-5912-90C6-4C26E424D3D6}" dt="2025-11-25T22:44:09.476" v="48" actId="1076"/>
+    <pc:chgData name="Hemma Philamore" userId="db50e2f3-17b2-4cc0-b719-fb6254d3e9df" providerId="ADAL" clId="{976AD799-FE43-55CA-A221-11B5AB66B93B}"/>
+    <pc:docChg chg="custSel addSld modSld">
+      <pc:chgData name="Hemma Philamore" userId="db50e2f3-17b2-4cc0-b719-fb6254d3e9df" providerId="ADAL" clId="{976AD799-FE43-55CA-A221-11B5AB66B93B}" dt="2026-10-02T09:52:57.352" v="45" actId="11529"/>
       <pc:docMkLst>
         <pc:docMk/>
       </pc:docMkLst>
-      <pc:sldChg chg="modSp mod">
-        <pc:chgData name="Hemma Philamore" userId="db50e2f3-17b2-4cc0-b719-fb6254d3e9df" providerId="ADAL" clId="{B5D85944-D90A-5912-90C6-4C26E424D3D6}" dt="2025-11-25T22:44:09.476" v="48" actId="1076"/>
+      <pc:sldChg chg="addSp delSp modSp new mod">
+        <pc:chgData name="Hemma Philamore" userId="db50e2f3-17b2-4cc0-b719-fb6254d3e9df" providerId="ADAL" clId="{976AD799-FE43-55CA-A221-11B5AB66B93B}" dt="2026-10-02T09:52:57.352" v="45" actId="11529"/>
         <pc:sldMkLst>
           <pc:docMk/>
-          <pc:sldMk cId="2055881703" sldId="256"/>
+          <pc:sldMk cId="163140457" sldId="259"/>
         </pc:sldMkLst>
-        <pc:spChg chg="mod">
-          <ac:chgData name="Hemma Philamore" userId="db50e2f3-17b2-4cc0-b719-fb6254d3e9df" providerId="ADAL" clId="{B5D85944-D90A-5912-90C6-4C26E424D3D6}" dt="2025-11-25T22:44:09.476" v="48" actId="1076"/>
+        <pc:spChg chg="add del mod">
+          <ac:chgData name="Hemma Philamore" userId="db50e2f3-17b2-4cc0-b719-fb6254d3e9df" providerId="ADAL" clId="{976AD799-FE43-55CA-A221-11B5AB66B93B}" dt="2026-10-02T09:52:49.538" v="44" actId="478"/>
           <ac:spMkLst>
             <pc:docMk/>
-            <pc:sldMk cId="2055881703" sldId="256"/>
-            <ac:spMk id="54" creationId="{796BBBEF-DDD2-260A-6642-AAF99653D558}"/>
+            <pc:sldMk cId="163140457" sldId="259"/>
+            <ac:spMk id="3" creationId="{EF2D6BC0-DEE6-A46C-8A85-24154D06AB87}"/>
           </ac:spMkLst>
         </pc:spChg>
-      </pc:sldChg>
-      <pc:sldChg chg="addSp modSp new mod">
-        <pc:chgData name="Hemma Philamore" userId="db50e2f3-17b2-4cc0-b719-fb6254d3e9df" providerId="ADAL" clId="{B5D85944-D90A-5912-90C6-4C26E424D3D6}" dt="2025-11-20T16:48:46.294" v="6" actId="1076"/>
-        <pc:sldMkLst>
-          <pc:docMk/>
-          <pc:sldMk cId="3011264781" sldId="257"/>
-        </pc:sldMkLst>
-        <pc:spChg chg="mod">
-          <ac:chgData name="Hemma Philamore" userId="db50e2f3-17b2-4cc0-b719-fb6254d3e9df" providerId="ADAL" clId="{B5D85944-D90A-5912-90C6-4C26E424D3D6}" dt="2025-11-20T16:48:46.294" v="6" actId="1076"/>
+        <pc:spChg chg="add del mod">
+          <ac:chgData name="Hemma Philamore" userId="db50e2f3-17b2-4cc0-b719-fb6254d3e9df" providerId="ADAL" clId="{976AD799-FE43-55CA-A221-11B5AB66B93B}" dt="2026-10-02T09:52:48.744" v="43" actId="478"/>
           <ac:spMkLst>
             <pc:docMk/>
-            <pc:sldMk cId="3011264781" sldId="257"/>
-            <ac:spMk id="6" creationId="{6DFD7044-7745-9F60-CDD7-98F2F92A2D8C}"/>
+            <pc:sldMk cId="163140457" sldId="259"/>
+            <ac:spMk id="4" creationId="{1E9AFA0C-7EAC-8618-C70A-5F9895AB93F5}"/>
           </ac:spMkLst>
         </pc:spChg>
-        <pc:spChg chg="mod">
-          <ac:chgData name="Hemma Philamore" userId="db50e2f3-17b2-4cc0-b719-fb6254d3e9df" providerId="ADAL" clId="{B5D85944-D90A-5912-90C6-4C26E424D3D6}" dt="2025-11-20T16:48:46.294" v="6" actId="1076"/>
-          <ac:spMkLst>
+        <pc:graphicFrameChg chg="add mod modGraphic">
+          <ac:chgData name="Hemma Philamore" userId="db50e2f3-17b2-4cc0-b719-fb6254d3e9df" providerId="ADAL" clId="{976AD799-FE43-55CA-A221-11B5AB66B93B}" dt="2026-10-02T09:52:28.050" v="42" actId="1076"/>
+          <ac:graphicFrameMkLst>
             <pc:docMk/>
-            <pc:sldMk cId="3011264781" sldId="257"/>
-            <ac:spMk id="8" creationId="{FD2E9BE0-9A4C-40B4-625D-E130305525D1}"/>
-          </ac:spMkLst>
-        </pc:spChg>
-        <pc:spChg chg="mod">
-          <ac:chgData name="Hemma Philamore" userId="db50e2f3-17b2-4cc0-b719-fb6254d3e9df" providerId="ADAL" clId="{B5D85944-D90A-5912-90C6-4C26E424D3D6}" dt="2025-11-20T16:48:46.294" v="6" actId="1076"/>
-          <ac:spMkLst>
-            <pc:docMk/>
-            <pc:sldMk cId="3011264781" sldId="257"/>
-            <ac:spMk id="9" creationId="{462616D0-A515-5F39-1C54-7F7490BD915C}"/>
-          </ac:spMkLst>
-        </pc:spChg>
-        <pc:spChg chg="mod">
-          <ac:chgData name="Hemma Philamore" userId="db50e2f3-17b2-4cc0-b719-fb6254d3e9df" providerId="ADAL" clId="{B5D85944-D90A-5912-90C6-4C26E424D3D6}" dt="2025-11-20T16:48:46.294" v="6" actId="1076"/>
-          <ac:spMkLst>
-            <pc:docMk/>
-            <pc:sldMk cId="3011264781" sldId="257"/>
-            <ac:spMk id="11" creationId="{4FB76C4B-08B1-3EAC-A0FF-39A83A522A6A}"/>
-          </ac:spMkLst>
-        </pc:spChg>
-        <pc:spChg chg="add mod">
-          <ac:chgData name="Hemma Philamore" userId="db50e2f3-17b2-4cc0-b719-fb6254d3e9df" providerId="ADAL" clId="{B5D85944-D90A-5912-90C6-4C26E424D3D6}" dt="2025-11-20T16:48:46.294" v="6" actId="1076"/>
-          <ac:spMkLst>
-            <pc:docMk/>
-            <pc:sldMk cId="3011264781" sldId="257"/>
-            <ac:spMk id="12" creationId="{1F7429F0-B60D-A975-4D0F-D190CBC16DD5}"/>
-          </ac:spMkLst>
-        </pc:spChg>
-        <pc:grpChg chg="add mod">
-          <ac:chgData name="Hemma Philamore" userId="db50e2f3-17b2-4cc0-b719-fb6254d3e9df" providerId="ADAL" clId="{B5D85944-D90A-5912-90C6-4C26E424D3D6}" dt="2025-11-20T16:48:46.294" v="6" actId="1076"/>
-          <ac:grpSpMkLst>
-            <pc:docMk/>
-            <pc:sldMk cId="3011264781" sldId="257"/>
-            <ac:grpSpMk id="4" creationId="{55BB94D3-42DA-D7AE-3BDC-18C0221FD515}"/>
-          </ac:grpSpMkLst>
-        </pc:grpChg>
-        <pc:grpChg chg="mod">
-          <ac:chgData name="Hemma Philamore" userId="db50e2f3-17b2-4cc0-b719-fb6254d3e9df" providerId="ADAL" clId="{B5D85944-D90A-5912-90C6-4C26E424D3D6}" dt="2025-11-20T16:48:46.294" v="6" actId="1076"/>
-          <ac:grpSpMkLst>
-            <pc:docMk/>
-            <pc:sldMk cId="3011264781" sldId="257"/>
-            <ac:grpSpMk id="5" creationId="{60DA3610-2176-1129-5F8A-F5763275E98C}"/>
-          </ac:grpSpMkLst>
-        </pc:grpChg>
-        <pc:picChg chg="add mod">
-          <ac:chgData name="Hemma Philamore" userId="db50e2f3-17b2-4cc0-b719-fb6254d3e9df" providerId="ADAL" clId="{B5D85944-D90A-5912-90C6-4C26E424D3D6}" dt="2025-11-20T16:47:41.786" v="4" actId="1076"/>
-          <ac:picMkLst>
-            <pc:docMk/>
-            <pc:sldMk cId="3011264781" sldId="257"/>
-            <ac:picMk id="3" creationId="{B3D58153-75CA-7745-F646-268E96C726F6}"/>
-          </ac:picMkLst>
-        </pc:picChg>
-        <pc:picChg chg="mod">
-          <ac:chgData name="Hemma Philamore" userId="db50e2f3-17b2-4cc0-b719-fb6254d3e9df" providerId="ADAL" clId="{B5D85944-D90A-5912-90C6-4C26E424D3D6}" dt="2025-11-20T16:48:46.294" v="6" actId="1076"/>
-          <ac:picMkLst>
-            <pc:docMk/>
-            <pc:sldMk cId="3011264781" sldId="257"/>
-            <ac:picMk id="7" creationId="{47C946D0-0CD7-6C54-CB9D-9240A8BF0873}"/>
-          </ac:picMkLst>
-        </pc:picChg>
-        <pc:cxnChg chg="mod">
-          <ac:chgData name="Hemma Philamore" userId="db50e2f3-17b2-4cc0-b719-fb6254d3e9df" providerId="ADAL" clId="{B5D85944-D90A-5912-90C6-4C26E424D3D6}" dt="2025-11-20T16:48:46.294" v="6" actId="1076"/>
+            <pc:sldMk cId="163140457" sldId="259"/>
+            <ac:graphicFrameMk id="2" creationId="{139529C0-10FD-CB04-F0FC-BBBE8A4E2886}"/>
+          </ac:graphicFrameMkLst>
+        </pc:graphicFrameChg>
+        <pc:cxnChg chg="add">
+          <ac:chgData name="Hemma Philamore" userId="db50e2f3-17b2-4cc0-b719-fb6254d3e9df" providerId="ADAL" clId="{976AD799-FE43-55CA-A221-11B5AB66B93B}" dt="2026-10-02T09:52:57.352" v="45" actId="11529"/>
           <ac:cxnSpMkLst>
             <pc:docMk/>
-            <pc:sldMk cId="3011264781" sldId="257"/>
-            <ac:cxnSpMk id="10" creationId="{282FE7DB-D6EA-0259-7F75-B26381AEB14E}"/>
+            <pc:sldMk cId="163140457" sldId="259"/>
+            <ac:cxnSpMk id="6" creationId="{D63FC6AD-4287-93E9-676C-1DDAE79AE88E}"/>
           </ac:cxnSpMkLst>
         </pc:cxnChg>
-      </pc:sldChg>
-    </pc:docChg>
-  </pc:docChgLst>
-  <pc:docChgLst>
-    <pc:chgData name="Hemma Philamore" userId="db50e2f3-17b2-4cc0-b719-fb6254d3e9df" providerId="ADAL" clId="{35C0B9A2-A60C-57EC-AD9B-630767BE11FE}"/>
-    <pc:docChg chg="undo custSel addSld modSld">
-      <pc:chgData name="Hemma Philamore" userId="db50e2f3-17b2-4cc0-b719-fb6254d3e9df" providerId="ADAL" clId="{35C0B9A2-A60C-57EC-AD9B-630767BE11FE}" dt="2025-11-21T11:36:54.126" v="836" actId="164"/>
-      <pc:docMkLst>
-        <pc:docMk/>
-      </pc:docMkLst>
-      <pc:sldChg chg="addSp delSp modSp mod">
-        <pc:chgData name="Hemma Philamore" userId="db50e2f3-17b2-4cc0-b719-fb6254d3e9df" providerId="ADAL" clId="{35C0B9A2-A60C-57EC-AD9B-630767BE11FE}" dt="2025-11-20T11:17:46.971" v="805" actId="1076"/>
-        <pc:sldMkLst>
-          <pc:docMk/>
-          <pc:sldMk cId="2055881703" sldId="256"/>
-        </pc:sldMkLst>
-        <pc:spChg chg="add mod">
-          <ac:chgData name="Hemma Philamore" userId="db50e2f3-17b2-4cc0-b719-fb6254d3e9df" providerId="ADAL" clId="{35C0B9A2-A60C-57EC-AD9B-630767BE11FE}" dt="2025-11-20T11:15:26.553" v="734" actId="1076"/>
-          <ac:spMkLst>
-            <pc:docMk/>
-            <pc:sldMk cId="2055881703" sldId="256"/>
-            <ac:spMk id="10" creationId="{60E0CE97-DD2D-18CC-926E-6ADE97B57EC4}"/>
-          </ac:spMkLst>
-        </pc:spChg>
-        <pc:spChg chg="add mod">
-          <ac:chgData name="Hemma Philamore" userId="db50e2f3-17b2-4cc0-b719-fb6254d3e9df" providerId="ADAL" clId="{35C0B9A2-A60C-57EC-AD9B-630767BE11FE}" dt="2025-11-20T11:15:26.553" v="734" actId="1076"/>
-          <ac:spMkLst>
-            <pc:docMk/>
-            <pc:sldMk cId="2055881703" sldId="256"/>
-            <ac:spMk id="35" creationId="{7B5CDB9E-62C5-1CD0-7B04-4B5F37B27EB4}"/>
-          </ac:spMkLst>
-        </pc:spChg>
-        <pc:spChg chg="add mod">
-          <ac:chgData name="Hemma Philamore" userId="db50e2f3-17b2-4cc0-b719-fb6254d3e9df" providerId="ADAL" clId="{35C0B9A2-A60C-57EC-AD9B-630767BE11FE}" dt="2025-11-20T11:15:26.553" v="734" actId="1076"/>
-          <ac:spMkLst>
-            <pc:docMk/>
-            <pc:sldMk cId="2055881703" sldId="256"/>
-            <ac:spMk id="36" creationId="{CC6EA5C2-DF3F-D956-D702-55D7F2321D82}"/>
-          </ac:spMkLst>
-        </pc:spChg>
-        <pc:spChg chg="add mod">
-          <ac:chgData name="Hemma Philamore" userId="db50e2f3-17b2-4cc0-b719-fb6254d3e9df" providerId="ADAL" clId="{35C0B9A2-A60C-57EC-AD9B-630767BE11FE}" dt="2025-11-20T11:15:26.553" v="734" actId="1076"/>
-          <ac:spMkLst>
-            <pc:docMk/>
-            <pc:sldMk cId="2055881703" sldId="256"/>
-            <ac:spMk id="37" creationId="{97F811E5-8FE7-C7B1-1D93-857A899DA576}"/>
-          </ac:spMkLst>
-        </pc:spChg>
-        <pc:spChg chg="add mod">
-          <ac:chgData name="Hemma Philamore" userId="db50e2f3-17b2-4cc0-b719-fb6254d3e9df" providerId="ADAL" clId="{35C0B9A2-A60C-57EC-AD9B-630767BE11FE}" dt="2025-11-20T11:15:26.553" v="734" actId="1076"/>
-          <ac:spMkLst>
-            <pc:docMk/>
-            <pc:sldMk cId="2055881703" sldId="256"/>
-            <ac:spMk id="38" creationId="{064E06A8-7E80-1EB9-53E1-4B0477B2B535}"/>
-          </ac:spMkLst>
-        </pc:spChg>
-        <pc:spChg chg="add mod">
-          <ac:chgData name="Hemma Philamore" userId="db50e2f3-17b2-4cc0-b719-fb6254d3e9df" providerId="ADAL" clId="{35C0B9A2-A60C-57EC-AD9B-630767BE11FE}" dt="2025-11-20T11:15:26.553" v="734" actId="1076"/>
-          <ac:spMkLst>
-            <pc:docMk/>
-            <pc:sldMk cId="2055881703" sldId="256"/>
-            <ac:spMk id="39" creationId="{B7888FCC-35C8-8476-CD56-DD66847117B6}"/>
-          </ac:spMkLst>
-        </pc:spChg>
-        <pc:spChg chg="add mod">
-          <ac:chgData name="Hemma Philamore" userId="db50e2f3-17b2-4cc0-b719-fb6254d3e9df" providerId="ADAL" clId="{35C0B9A2-A60C-57EC-AD9B-630767BE11FE}" dt="2025-11-20T11:15:26.553" v="734" actId="1076"/>
-          <ac:spMkLst>
-            <pc:docMk/>
-            <pc:sldMk cId="2055881703" sldId="256"/>
-            <ac:spMk id="54" creationId="{796BBBEF-DDD2-260A-6642-AAF99653D558}"/>
-          </ac:spMkLst>
-        </pc:spChg>
-        <pc:spChg chg="add mod topLvl">
-          <ac:chgData name="Hemma Philamore" userId="db50e2f3-17b2-4cc0-b719-fb6254d3e9df" providerId="ADAL" clId="{35C0B9A2-A60C-57EC-AD9B-630767BE11FE}" dt="2025-11-20T10:55:22.304" v="528" actId="164"/>
-          <ac:spMkLst>
-            <pc:docMk/>
-            <pc:sldMk cId="2055881703" sldId="256"/>
-            <ac:spMk id="81" creationId="{BA212C20-9017-D351-E435-3EA27BDAE880}"/>
-          </ac:spMkLst>
-        </pc:spChg>
-        <pc:spChg chg="add mod topLvl">
-          <ac:chgData name="Hemma Philamore" userId="db50e2f3-17b2-4cc0-b719-fb6254d3e9df" providerId="ADAL" clId="{35C0B9A2-A60C-57EC-AD9B-630767BE11FE}" dt="2025-11-20T10:55:22.304" v="528" actId="164"/>
-          <ac:spMkLst>
-            <pc:docMk/>
-            <pc:sldMk cId="2055881703" sldId="256"/>
-            <ac:spMk id="82" creationId="{755524AC-2D41-9852-186E-7B8DD8F65B97}"/>
-          </ac:spMkLst>
-        </pc:spChg>
-        <pc:spChg chg="add mod topLvl">
-          <ac:chgData name="Hemma Philamore" userId="db50e2f3-17b2-4cc0-b719-fb6254d3e9df" providerId="ADAL" clId="{35C0B9A2-A60C-57EC-AD9B-630767BE11FE}" dt="2025-11-20T10:55:22.304" v="528" actId="164"/>
-          <ac:spMkLst>
-            <pc:docMk/>
-            <pc:sldMk cId="2055881703" sldId="256"/>
-            <ac:spMk id="84" creationId="{5B6DD94F-1C69-5F0D-6BE3-AABE90845ED3}"/>
-          </ac:spMkLst>
-        </pc:spChg>
-        <pc:spChg chg="add mod">
-          <ac:chgData name="Hemma Philamore" userId="db50e2f3-17b2-4cc0-b719-fb6254d3e9df" providerId="ADAL" clId="{35C0B9A2-A60C-57EC-AD9B-630767BE11FE}" dt="2025-11-20T10:55:27.716" v="530" actId="164"/>
-          <ac:spMkLst>
-            <pc:docMk/>
-            <pc:sldMk cId="2055881703" sldId="256"/>
-            <ac:spMk id="105" creationId="{8907CBF1-81E1-58E1-5311-4214CA857A51}"/>
-          </ac:spMkLst>
-        </pc:spChg>
-        <pc:spChg chg="add mod">
-          <ac:chgData name="Hemma Philamore" userId="db50e2f3-17b2-4cc0-b719-fb6254d3e9df" providerId="ADAL" clId="{35C0B9A2-A60C-57EC-AD9B-630767BE11FE}" dt="2025-11-20T10:55:27.716" v="530" actId="164"/>
-          <ac:spMkLst>
-            <pc:docMk/>
-            <pc:sldMk cId="2055881703" sldId="256"/>
-            <ac:spMk id="106" creationId="{5A82E9F3-14D7-1A03-66CB-2293CA26106B}"/>
-          </ac:spMkLst>
-        </pc:spChg>
-        <pc:spChg chg="add mod">
-          <ac:chgData name="Hemma Philamore" userId="db50e2f3-17b2-4cc0-b719-fb6254d3e9df" providerId="ADAL" clId="{35C0B9A2-A60C-57EC-AD9B-630767BE11FE}" dt="2025-11-20T10:55:27.716" v="530" actId="164"/>
-          <ac:spMkLst>
-            <pc:docMk/>
-            <pc:sldMk cId="2055881703" sldId="256"/>
-            <ac:spMk id="108" creationId="{574A52BE-3A75-7A84-952F-44730140046B}"/>
-          </ac:spMkLst>
-        </pc:spChg>
-        <pc:spChg chg="add mod">
-          <ac:chgData name="Hemma Philamore" userId="db50e2f3-17b2-4cc0-b719-fb6254d3e9df" providerId="ADAL" clId="{35C0B9A2-A60C-57EC-AD9B-630767BE11FE}" dt="2025-11-20T11:13:11.897" v="728" actId="14100"/>
-          <ac:spMkLst>
-            <pc:docMk/>
-            <pc:sldMk cId="2055881703" sldId="256"/>
-            <ac:spMk id="129" creationId="{9F4F5933-E2EA-6B1A-5B63-528E42B2F558}"/>
-          </ac:spMkLst>
-        </pc:spChg>
-        <pc:spChg chg="add mod">
-          <ac:chgData name="Hemma Philamore" userId="db50e2f3-17b2-4cc0-b719-fb6254d3e9df" providerId="ADAL" clId="{35C0B9A2-A60C-57EC-AD9B-630767BE11FE}" dt="2025-11-20T11:13:20.194" v="731" actId="164"/>
-          <ac:spMkLst>
-            <pc:docMk/>
-            <pc:sldMk cId="2055881703" sldId="256"/>
-            <ac:spMk id="132" creationId="{E806D719-D4A1-834F-726B-36246C3FE2FB}"/>
-          </ac:spMkLst>
-        </pc:spChg>
-        <pc:spChg chg="add mod">
-          <ac:chgData name="Hemma Philamore" userId="db50e2f3-17b2-4cc0-b719-fb6254d3e9df" providerId="ADAL" clId="{35C0B9A2-A60C-57EC-AD9B-630767BE11FE}" dt="2025-11-20T11:13:20.194" v="731" actId="164"/>
-          <ac:spMkLst>
-            <pc:docMk/>
-            <pc:sldMk cId="2055881703" sldId="256"/>
-            <ac:spMk id="133" creationId="{A901687B-BB95-6877-11D4-9044C652E42B}"/>
-          </ac:spMkLst>
-        </pc:spChg>
-        <pc:spChg chg="add mod">
-          <ac:chgData name="Hemma Philamore" userId="db50e2f3-17b2-4cc0-b719-fb6254d3e9df" providerId="ADAL" clId="{35C0B9A2-A60C-57EC-AD9B-630767BE11FE}" dt="2025-11-20T11:13:20.194" v="731" actId="164"/>
-          <ac:spMkLst>
-            <pc:docMk/>
-            <pc:sldMk cId="2055881703" sldId="256"/>
-            <ac:spMk id="137" creationId="{0610DE0E-9640-6D88-FAA1-02F654367001}"/>
-          </ac:spMkLst>
-        </pc:spChg>
-        <pc:spChg chg="add mod">
-          <ac:chgData name="Hemma Philamore" userId="db50e2f3-17b2-4cc0-b719-fb6254d3e9df" providerId="ADAL" clId="{35C0B9A2-A60C-57EC-AD9B-630767BE11FE}" dt="2025-11-20T10:56:57.702" v="562" actId="1076"/>
-          <ac:spMkLst>
-            <pc:docMk/>
-            <pc:sldMk cId="2055881703" sldId="256"/>
-            <ac:spMk id="138" creationId="{0E0FC26D-5518-1BE3-15AA-742813F0402B}"/>
-          </ac:spMkLst>
-        </pc:spChg>
-        <pc:spChg chg="add mod">
-          <ac:chgData name="Hemma Philamore" userId="db50e2f3-17b2-4cc0-b719-fb6254d3e9df" providerId="ADAL" clId="{35C0B9A2-A60C-57EC-AD9B-630767BE11FE}" dt="2025-11-20T10:57:02.426" v="564" actId="20577"/>
-          <ac:spMkLst>
-            <pc:docMk/>
-            <pc:sldMk cId="2055881703" sldId="256"/>
-            <ac:spMk id="139" creationId="{2C360369-67C1-4F1C-B8EA-DE7ABD95EEAC}"/>
-          </ac:spMkLst>
-        </pc:spChg>
-        <pc:spChg chg="add mod">
-          <ac:chgData name="Hemma Philamore" userId="db50e2f3-17b2-4cc0-b719-fb6254d3e9df" providerId="ADAL" clId="{35C0B9A2-A60C-57EC-AD9B-630767BE11FE}" dt="2025-11-20T11:13:20.194" v="731" actId="164"/>
-          <ac:spMkLst>
-            <pc:docMk/>
-            <pc:sldMk cId="2055881703" sldId="256"/>
-            <ac:spMk id="140" creationId="{62C9EE40-C49A-B85F-2443-F4D90C8FF3B9}"/>
-          </ac:spMkLst>
-        </pc:spChg>
-        <pc:spChg chg="add mod">
-          <ac:chgData name="Hemma Philamore" userId="db50e2f3-17b2-4cc0-b719-fb6254d3e9df" providerId="ADAL" clId="{35C0B9A2-A60C-57EC-AD9B-630767BE11FE}" dt="2025-11-20T11:16:23.210" v="765" actId="1076"/>
-          <ac:spMkLst>
-            <pc:docMk/>
-            <pc:sldMk cId="2055881703" sldId="256"/>
-            <ac:spMk id="141" creationId="{C184240A-D570-C811-1CA7-8288BBE6D7A8}"/>
-          </ac:spMkLst>
-        </pc:spChg>
-        <pc:spChg chg="add mod">
-          <ac:chgData name="Hemma Philamore" userId="db50e2f3-17b2-4cc0-b719-fb6254d3e9df" providerId="ADAL" clId="{35C0B9A2-A60C-57EC-AD9B-630767BE11FE}" dt="2025-11-20T11:13:11.897" v="728" actId="14100"/>
-          <ac:spMkLst>
-            <pc:docMk/>
-            <pc:sldMk cId="2055881703" sldId="256"/>
-            <ac:spMk id="142" creationId="{95202DC0-ABA9-D8E5-0B09-CF2DD84557F6}"/>
-          </ac:spMkLst>
-        </pc:spChg>
-        <pc:spChg chg="add mod">
-          <ac:chgData name="Hemma Philamore" userId="db50e2f3-17b2-4cc0-b719-fb6254d3e9df" providerId="ADAL" clId="{35C0B9A2-A60C-57EC-AD9B-630767BE11FE}" dt="2025-11-20T11:13:20.194" v="731" actId="164"/>
-          <ac:spMkLst>
-            <pc:docMk/>
-            <pc:sldMk cId="2055881703" sldId="256"/>
-            <ac:spMk id="143" creationId="{C635F0BA-EE39-CB85-06DF-0465133008AC}"/>
-          </ac:spMkLst>
-        </pc:spChg>
-        <pc:spChg chg="add mod">
-          <ac:chgData name="Hemma Philamore" userId="db50e2f3-17b2-4cc0-b719-fb6254d3e9df" providerId="ADAL" clId="{35C0B9A2-A60C-57EC-AD9B-630767BE11FE}" dt="2025-11-20T11:13:20.194" v="731" actId="164"/>
-          <ac:spMkLst>
-            <pc:docMk/>
-            <pc:sldMk cId="2055881703" sldId="256"/>
-            <ac:spMk id="144" creationId="{33290139-0808-1A17-2513-68092AA2C4BA}"/>
-          </ac:spMkLst>
-        </pc:spChg>
-        <pc:spChg chg="add mod">
-          <ac:chgData name="Hemma Philamore" userId="db50e2f3-17b2-4cc0-b719-fb6254d3e9df" providerId="ADAL" clId="{35C0B9A2-A60C-57EC-AD9B-630767BE11FE}" dt="2025-11-20T11:13:20.194" v="731" actId="164"/>
-          <ac:spMkLst>
-            <pc:docMk/>
-            <pc:sldMk cId="2055881703" sldId="256"/>
-            <ac:spMk id="145" creationId="{5C8E88E4-67B7-6EF3-807F-32A2D34AE4E1}"/>
-          </ac:spMkLst>
-        </pc:spChg>
-        <pc:spChg chg="add mod">
-          <ac:chgData name="Hemma Philamore" userId="db50e2f3-17b2-4cc0-b719-fb6254d3e9df" providerId="ADAL" clId="{35C0B9A2-A60C-57EC-AD9B-630767BE11FE}" dt="2025-11-20T11:16:13.321" v="762" actId="1076"/>
-          <ac:spMkLst>
-            <pc:docMk/>
-            <pc:sldMk cId="2055881703" sldId="256"/>
-            <ac:spMk id="146" creationId="{C1D912B4-04FE-AE8D-414C-940E84C53DE4}"/>
-          </ac:spMkLst>
-        </pc:spChg>
-        <pc:spChg chg="add mod">
-          <ac:chgData name="Hemma Philamore" userId="db50e2f3-17b2-4cc0-b719-fb6254d3e9df" providerId="ADAL" clId="{35C0B9A2-A60C-57EC-AD9B-630767BE11FE}" dt="2025-11-20T11:16:27.970" v="766" actId="1076"/>
-          <ac:spMkLst>
-            <pc:docMk/>
-            <pc:sldMk cId="2055881703" sldId="256"/>
-            <ac:spMk id="147" creationId="{09636BE3-017E-011B-4DC2-6C7003A7C0B7}"/>
-          </ac:spMkLst>
-        </pc:spChg>
-        <pc:spChg chg="add mod">
-          <ac:chgData name="Hemma Philamore" userId="db50e2f3-17b2-4cc0-b719-fb6254d3e9df" providerId="ADAL" clId="{35C0B9A2-A60C-57EC-AD9B-630767BE11FE}" dt="2025-11-20T11:16:27.970" v="766" actId="1076"/>
-          <ac:spMkLst>
-            <pc:docMk/>
-            <pc:sldMk cId="2055881703" sldId="256"/>
-            <ac:spMk id="148" creationId="{7F7DD150-EFCB-CF92-3A0D-52D154B3C4C7}"/>
-          </ac:spMkLst>
-        </pc:spChg>
-        <pc:spChg chg="add mod">
-          <ac:chgData name="Hemma Philamore" userId="db50e2f3-17b2-4cc0-b719-fb6254d3e9df" providerId="ADAL" clId="{35C0B9A2-A60C-57EC-AD9B-630767BE11FE}" dt="2025-11-20T11:16:27.970" v="766" actId="1076"/>
-          <ac:spMkLst>
-            <pc:docMk/>
-            <pc:sldMk cId="2055881703" sldId="256"/>
-            <ac:spMk id="149" creationId="{18B7952A-65FE-3155-F900-858FFFE37391}"/>
-          </ac:spMkLst>
-        </pc:spChg>
-        <pc:spChg chg="add mod">
-          <ac:chgData name="Hemma Philamore" userId="db50e2f3-17b2-4cc0-b719-fb6254d3e9df" providerId="ADAL" clId="{35C0B9A2-A60C-57EC-AD9B-630767BE11FE}" dt="2025-11-20T11:16:27.970" v="766" actId="1076"/>
-          <ac:spMkLst>
-            <pc:docMk/>
-            <pc:sldMk cId="2055881703" sldId="256"/>
-            <ac:spMk id="158" creationId="{84582470-0EEB-E66A-178A-F2E075E5495E}"/>
-          </ac:spMkLst>
-        </pc:spChg>
-        <pc:spChg chg="add mod">
-          <ac:chgData name="Hemma Philamore" userId="db50e2f3-17b2-4cc0-b719-fb6254d3e9df" providerId="ADAL" clId="{35C0B9A2-A60C-57EC-AD9B-630767BE11FE}" dt="2025-11-20T11:16:13.321" v="762" actId="1076"/>
-          <ac:spMkLst>
-            <pc:docMk/>
-            <pc:sldMk cId="2055881703" sldId="256"/>
-            <ac:spMk id="159" creationId="{633A17CD-A03E-7222-E108-CC4C5EDF0EAB}"/>
-          </ac:spMkLst>
-        </pc:spChg>
-        <pc:spChg chg="add mod">
-          <ac:chgData name="Hemma Philamore" userId="db50e2f3-17b2-4cc0-b719-fb6254d3e9df" providerId="ADAL" clId="{35C0B9A2-A60C-57EC-AD9B-630767BE11FE}" dt="2025-11-20T11:16:27.970" v="766" actId="1076"/>
-          <ac:spMkLst>
-            <pc:docMk/>
-            <pc:sldMk cId="2055881703" sldId="256"/>
-            <ac:spMk id="160" creationId="{3C68C252-B471-396C-466C-59C57439D82B}"/>
-          </ac:spMkLst>
-        </pc:spChg>
-        <pc:spChg chg="add mod">
-          <ac:chgData name="Hemma Philamore" userId="db50e2f3-17b2-4cc0-b719-fb6254d3e9df" providerId="ADAL" clId="{35C0B9A2-A60C-57EC-AD9B-630767BE11FE}" dt="2025-11-20T11:16:27.970" v="766" actId="1076"/>
-          <ac:spMkLst>
-            <pc:docMk/>
-            <pc:sldMk cId="2055881703" sldId="256"/>
-            <ac:spMk id="161" creationId="{DD3E4F3D-EB3D-8A11-C300-BE4056FA9AFD}"/>
-          </ac:spMkLst>
-        </pc:spChg>
-        <pc:spChg chg="add mod">
-          <ac:chgData name="Hemma Philamore" userId="db50e2f3-17b2-4cc0-b719-fb6254d3e9df" providerId="ADAL" clId="{35C0B9A2-A60C-57EC-AD9B-630767BE11FE}" dt="2025-11-20T11:15:40.297" v="736" actId="1076"/>
-          <ac:spMkLst>
-            <pc:docMk/>
-            <pc:sldMk cId="2055881703" sldId="256"/>
-            <ac:spMk id="165" creationId="{73051262-A936-D79E-0DE7-C7DBA5F496F8}"/>
-          </ac:spMkLst>
-        </pc:spChg>
-        <pc:spChg chg="add mod">
-          <ac:chgData name="Hemma Philamore" userId="db50e2f3-17b2-4cc0-b719-fb6254d3e9df" providerId="ADAL" clId="{35C0B9A2-A60C-57EC-AD9B-630767BE11FE}" dt="2025-11-20T11:04:14.808" v="680" actId="1076"/>
-          <ac:spMkLst>
-            <pc:docMk/>
-            <pc:sldMk cId="2055881703" sldId="256"/>
-            <ac:spMk id="166" creationId="{9ABAA755-24B4-E4BB-D190-E0F90F93CA89}"/>
-          </ac:spMkLst>
-        </pc:spChg>
-        <pc:spChg chg="add mod">
-          <ac:chgData name="Hemma Philamore" userId="db50e2f3-17b2-4cc0-b719-fb6254d3e9df" providerId="ADAL" clId="{35C0B9A2-A60C-57EC-AD9B-630767BE11FE}" dt="2025-11-20T11:15:40.297" v="736" actId="1076"/>
-          <ac:spMkLst>
-            <pc:docMk/>
-            <pc:sldMk cId="2055881703" sldId="256"/>
-            <ac:spMk id="167" creationId="{F503C6A3-B34E-450B-318A-5CA6D2A1F66B}"/>
-          </ac:spMkLst>
-        </pc:spChg>
-        <pc:spChg chg="add mod">
-          <ac:chgData name="Hemma Philamore" userId="db50e2f3-17b2-4cc0-b719-fb6254d3e9df" providerId="ADAL" clId="{35C0B9A2-A60C-57EC-AD9B-630767BE11FE}" dt="2025-11-20T11:15:40.297" v="736" actId="1076"/>
-          <ac:spMkLst>
-            <pc:docMk/>
-            <pc:sldMk cId="2055881703" sldId="256"/>
-            <ac:spMk id="168" creationId="{1C342195-3F69-6A53-0A9A-DC6E3BE4406F}"/>
-          </ac:spMkLst>
-        </pc:spChg>
-        <pc:spChg chg="add mod">
-          <ac:chgData name="Hemma Philamore" userId="db50e2f3-17b2-4cc0-b719-fb6254d3e9df" providerId="ADAL" clId="{35C0B9A2-A60C-57EC-AD9B-630767BE11FE}" dt="2025-11-20T11:15:40.297" v="736" actId="1076"/>
-          <ac:spMkLst>
-            <pc:docMk/>
-            <pc:sldMk cId="2055881703" sldId="256"/>
-            <ac:spMk id="169" creationId="{A9F01133-3EA8-50FE-CD03-F1B8AAA1DA19}"/>
-          </ac:spMkLst>
-        </pc:spChg>
-        <pc:spChg chg="add mod">
-          <ac:chgData name="Hemma Philamore" userId="db50e2f3-17b2-4cc0-b719-fb6254d3e9df" providerId="ADAL" clId="{35C0B9A2-A60C-57EC-AD9B-630767BE11FE}" dt="2025-11-20T11:15:40.297" v="736" actId="1076"/>
-          <ac:spMkLst>
-            <pc:docMk/>
-            <pc:sldMk cId="2055881703" sldId="256"/>
-            <ac:spMk id="170" creationId="{91789995-E92A-A125-D1DA-FB188C0C34A8}"/>
-          </ac:spMkLst>
-        </pc:spChg>
-        <pc:spChg chg="add mod">
-          <ac:chgData name="Hemma Philamore" userId="db50e2f3-17b2-4cc0-b719-fb6254d3e9df" providerId="ADAL" clId="{35C0B9A2-A60C-57EC-AD9B-630767BE11FE}" dt="2025-11-20T11:15:40.297" v="736" actId="1076"/>
-          <ac:spMkLst>
-            <pc:docMk/>
-            <pc:sldMk cId="2055881703" sldId="256"/>
-            <ac:spMk id="171" creationId="{40D516DC-F3D5-6943-38FD-C6D60482DAC8}"/>
-          </ac:spMkLst>
-        </pc:spChg>
-        <pc:spChg chg="add mod">
-          <ac:chgData name="Hemma Philamore" userId="db50e2f3-17b2-4cc0-b719-fb6254d3e9df" providerId="ADAL" clId="{35C0B9A2-A60C-57EC-AD9B-630767BE11FE}" dt="2025-11-20T11:04:14.808" v="680" actId="1076"/>
-          <ac:spMkLst>
-            <pc:docMk/>
-            <pc:sldMk cId="2055881703" sldId="256"/>
-            <ac:spMk id="172" creationId="{6F0A9ECA-2884-E143-83EF-E771B8E98069}"/>
-          </ac:spMkLst>
-        </pc:spChg>
-        <pc:spChg chg="add mod">
-          <ac:chgData name="Hemma Philamore" userId="db50e2f3-17b2-4cc0-b719-fb6254d3e9df" providerId="ADAL" clId="{35C0B9A2-A60C-57EC-AD9B-630767BE11FE}" dt="2025-11-20T11:04:44.384" v="688" actId="1076"/>
-          <ac:spMkLst>
-            <pc:docMk/>
-            <pc:sldMk cId="2055881703" sldId="256"/>
-            <ac:spMk id="178" creationId="{79E5E840-4382-14EF-C5A3-8A4E0D42E6C5}"/>
-          </ac:spMkLst>
-        </pc:spChg>
-        <pc:spChg chg="add mod">
-          <ac:chgData name="Hemma Philamore" userId="db50e2f3-17b2-4cc0-b719-fb6254d3e9df" providerId="ADAL" clId="{35C0B9A2-A60C-57EC-AD9B-630767BE11FE}" dt="2025-11-20T11:15:40.297" v="736" actId="1076"/>
-          <ac:spMkLst>
-            <pc:docMk/>
-            <pc:sldMk cId="2055881703" sldId="256"/>
-            <ac:spMk id="179" creationId="{BE81F596-AD64-E05A-6FA2-F53D768E27DE}"/>
-          </ac:spMkLst>
-        </pc:spChg>
-        <pc:spChg chg="add mod">
-          <ac:chgData name="Hemma Philamore" userId="db50e2f3-17b2-4cc0-b719-fb6254d3e9df" providerId="ADAL" clId="{35C0B9A2-A60C-57EC-AD9B-630767BE11FE}" dt="2025-11-20T11:15:40.297" v="736" actId="1076"/>
-          <ac:spMkLst>
-            <pc:docMk/>
-            <pc:sldMk cId="2055881703" sldId="256"/>
-            <ac:spMk id="180" creationId="{5BB976AC-9DE3-955D-B409-D5FC6D95421E}"/>
-          </ac:spMkLst>
-        </pc:spChg>
-        <pc:spChg chg="add mod">
-          <ac:chgData name="Hemma Philamore" userId="db50e2f3-17b2-4cc0-b719-fb6254d3e9df" providerId="ADAL" clId="{35C0B9A2-A60C-57EC-AD9B-630767BE11FE}" dt="2025-11-20T11:15:40.297" v="736" actId="1076"/>
-          <ac:spMkLst>
-            <pc:docMk/>
-            <pc:sldMk cId="2055881703" sldId="256"/>
-            <ac:spMk id="181" creationId="{ED3F161E-603D-5855-EDC8-C34997EA9AFF}"/>
-          </ac:spMkLst>
-        </pc:spChg>
-        <pc:spChg chg="add mod">
-          <ac:chgData name="Hemma Philamore" userId="db50e2f3-17b2-4cc0-b719-fb6254d3e9df" providerId="ADAL" clId="{35C0B9A2-A60C-57EC-AD9B-630767BE11FE}" dt="2025-11-20T11:04:19.200" v="681" actId="1076"/>
-          <ac:spMkLst>
-            <pc:docMk/>
-            <pc:sldMk cId="2055881703" sldId="256"/>
-            <ac:spMk id="182" creationId="{5B0824A6-7ACA-C005-A383-7480DECD7EA8}"/>
-          </ac:spMkLst>
-        </pc:spChg>
-        <pc:spChg chg="add mod">
-          <ac:chgData name="Hemma Philamore" userId="db50e2f3-17b2-4cc0-b719-fb6254d3e9df" providerId="ADAL" clId="{35C0B9A2-A60C-57EC-AD9B-630767BE11FE}" dt="2025-11-20T11:04:19.200" v="681" actId="1076"/>
-          <ac:spMkLst>
-            <pc:docMk/>
-            <pc:sldMk cId="2055881703" sldId="256"/>
-            <ac:spMk id="183" creationId="{7DC98C5A-CEA4-BD4A-13BF-F6300D0EF003}"/>
-          </ac:spMkLst>
-        </pc:spChg>
-        <pc:spChg chg="add mod">
-          <ac:chgData name="Hemma Philamore" userId="db50e2f3-17b2-4cc0-b719-fb6254d3e9df" providerId="ADAL" clId="{35C0B9A2-A60C-57EC-AD9B-630767BE11FE}" dt="2025-11-20T11:15:40.297" v="736" actId="1076"/>
-          <ac:spMkLst>
-            <pc:docMk/>
-            <pc:sldMk cId="2055881703" sldId="256"/>
-            <ac:spMk id="184" creationId="{87807A0D-BB39-57D6-5375-D647E12003F4}"/>
-          </ac:spMkLst>
-        </pc:spChg>
-        <pc:spChg chg="add mod">
-          <ac:chgData name="Hemma Philamore" userId="db50e2f3-17b2-4cc0-b719-fb6254d3e9df" providerId="ADAL" clId="{35C0B9A2-A60C-57EC-AD9B-630767BE11FE}" dt="2025-11-20T11:04:31.160" v="683" actId="1076"/>
-          <ac:spMkLst>
-            <pc:docMk/>
-            <pc:sldMk cId="2055881703" sldId="256"/>
-            <ac:spMk id="185" creationId="{87C958C5-6DDC-69AF-9537-EAB353E850C1}"/>
-          </ac:spMkLst>
-        </pc:spChg>
-        <pc:spChg chg="add mod">
-          <ac:chgData name="Hemma Philamore" userId="db50e2f3-17b2-4cc0-b719-fb6254d3e9df" providerId="ADAL" clId="{35C0B9A2-A60C-57EC-AD9B-630767BE11FE}" dt="2025-11-20T11:13:20.194" v="731" actId="164"/>
-          <ac:spMkLst>
-            <pc:docMk/>
-            <pc:sldMk cId="2055881703" sldId="256"/>
-            <ac:spMk id="186" creationId="{0ACA7466-9C80-3E89-E6D6-E97A73C6FFA8}"/>
-          </ac:spMkLst>
-        </pc:spChg>
-        <pc:spChg chg="add mod">
-          <ac:chgData name="Hemma Philamore" userId="db50e2f3-17b2-4cc0-b719-fb6254d3e9df" providerId="ADAL" clId="{35C0B9A2-A60C-57EC-AD9B-630767BE11FE}" dt="2025-11-20T11:13:20.194" v="731" actId="164"/>
-          <ac:spMkLst>
-            <pc:docMk/>
-            <pc:sldMk cId="2055881703" sldId="256"/>
-            <ac:spMk id="187" creationId="{8B484537-B9CD-25BC-DD89-F35C203A5573}"/>
-          </ac:spMkLst>
-        </pc:spChg>
-        <pc:spChg chg="add mod">
-          <ac:chgData name="Hemma Philamore" userId="db50e2f3-17b2-4cc0-b719-fb6254d3e9df" providerId="ADAL" clId="{35C0B9A2-A60C-57EC-AD9B-630767BE11FE}" dt="2025-11-20T11:13:20.194" v="731" actId="164"/>
-          <ac:spMkLst>
-            <pc:docMk/>
-            <pc:sldMk cId="2055881703" sldId="256"/>
-            <ac:spMk id="188" creationId="{A24723E6-DA6B-3DF4-7C45-6B8D7316B164}"/>
-          </ac:spMkLst>
-        </pc:spChg>
-        <pc:spChg chg="add mod">
-          <ac:chgData name="Hemma Philamore" userId="db50e2f3-17b2-4cc0-b719-fb6254d3e9df" providerId="ADAL" clId="{35C0B9A2-A60C-57EC-AD9B-630767BE11FE}" dt="2025-11-20T11:15:57.952" v="752" actId="1076"/>
-          <ac:spMkLst>
-            <pc:docMk/>
-            <pc:sldMk cId="2055881703" sldId="256"/>
-            <ac:spMk id="192" creationId="{898B9435-9DB3-67C0-072D-04E5341AB5BE}"/>
-          </ac:spMkLst>
-        </pc:spChg>
-        <pc:spChg chg="add mod">
-          <ac:chgData name="Hemma Philamore" userId="db50e2f3-17b2-4cc0-b719-fb6254d3e9df" providerId="ADAL" clId="{35C0B9A2-A60C-57EC-AD9B-630767BE11FE}" dt="2025-11-20T11:16:06.367" v="761" actId="1076"/>
-          <ac:spMkLst>
-            <pc:docMk/>
-            <pc:sldMk cId="2055881703" sldId="256"/>
-            <ac:spMk id="193" creationId="{5CA55AE9-2962-D895-4D16-35ECD2EC08D6}"/>
-          </ac:spMkLst>
-        </pc:spChg>
-        <pc:spChg chg="add mod">
-          <ac:chgData name="Hemma Philamore" userId="db50e2f3-17b2-4cc0-b719-fb6254d3e9df" providerId="ADAL" clId="{35C0B9A2-A60C-57EC-AD9B-630767BE11FE}" dt="2025-11-20T11:17:02.099" v="777" actId="1076"/>
-          <ac:spMkLst>
-            <pc:docMk/>
-            <pc:sldMk cId="2055881703" sldId="256"/>
-            <ac:spMk id="197" creationId="{BD626BF4-74DB-C0FA-9BB8-E21DB42634CF}"/>
-          </ac:spMkLst>
-        </pc:spChg>
-        <pc:spChg chg="add mod">
-          <ac:chgData name="Hemma Philamore" userId="db50e2f3-17b2-4cc0-b719-fb6254d3e9df" providerId="ADAL" clId="{35C0B9A2-A60C-57EC-AD9B-630767BE11FE}" dt="2025-11-20T11:17:02.099" v="777" actId="1076"/>
-          <ac:spMkLst>
-            <pc:docMk/>
-            <pc:sldMk cId="2055881703" sldId="256"/>
-            <ac:spMk id="198" creationId="{F2F22DDB-FB7A-C34A-D8DB-25CDB697AE81}"/>
-          </ac:spMkLst>
-        </pc:spChg>
-        <pc:spChg chg="add mod">
-          <ac:chgData name="Hemma Philamore" userId="db50e2f3-17b2-4cc0-b719-fb6254d3e9df" providerId="ADAL" clId="{35C0B9A2-A60C-57EC-AD9B-630767BE11FE}" dt="2025-11-20T11:17:02.099" v="777" actId="1076"/>
-          <ac:spMkLst>
-            <pc:docMk/>
-            <pc:sldMk cId="2055881703" sldId="256"/>
-            <ac:spMk id="199" creationId="{1F5074A3-E0C8-14CE-2E45-1A437768914B}"/>
-          </ac:spMkLst>
-        </pc:spChg>
-        <pc:spChg chg="add mod">
-          <ac:chgData name="Hemma Philamore" userId="db50e2f3-17b2-4cc0-b719-fb6254d3e9df" providerId="ADAL" clId="{35C0B9A2-A60C-57EC-AD9B-630767BE11FE}" dt="2025-11-20T11:16:51.457" v="774" actId="164"/>
-          <ac:spMkLst>
-            <pc:docMk/>
-            <pc:sldMk cId="2055881703" sldId="256"/>
-            <ac:spMk id="200" creationId="{41BFF106-723E-D958-1C0F-66E8757FCDD0}"/>
-          </ac:spMkLst>
-        </pc:spChg>
-        <pc:spChg chg="add mod">
-          <ac:chgData name="Hemma Philamore" userId="db50e2f3-17b2-4cc0-b719-fb6254d3e9df" providerId="ADAL" clId="{35C0B9A2-A60C-57EC-AD9B-630767BE11FE}" dt="2025-11-20T11:16:51.457" v="774" actId="164"/>
-          <ac:spMkLst>
-            <pc:docMk/>
-            <pc:sldMk cId="2055881703" sldId="256"/>
-            <ac:spMk id="201" creationId="{EEA92A1E-D4E2-8B5C-26BA-EB79502341EF}"/>
-          </ac:spMkLst>
-        </pc:spChg>
-        <pc:spChg chg="add mod">
-          <ac:chgData name="Hemma Philamore" userId="db50e2f3-17b2-4cc0-b719-fb6254d3e9df" providerId="ADAL" clId="{35C0B9A2-A60C-57EC-AD9B-630767BE11FE}" dt="2025-11-20T11:16:51.457" v="774" actId="164"/>
-          <ac:spMkLst>
-            <pc:docMk/>
-            <pc:sldMk cId="2055881703" sldId="256"/>
-            <ac:spMk id="202" creationId="{900F1ABB-1CF6-F58D-0E98-820101CBF84B}"/>
-          </ac:spMkLst>
-        </pc:spChg>
-        <pc:spChg chg="add mod">
-          <ac:chgData name="Hemma Philamore" userId="db50e2f3-17b2-4cc0-b719-fb6254d3e9df" providerId="ADAL" clId="{35C0B9A2-A60C-57EC-AD9B-630767BE11FE}" dt="2025-11-20T11:17:02.099" v="777" actId="1076"/>
-          <ac:spMkLst>
-            <pc:docMk/>
-            <pc:sldMk cId="2055881703" sldId="256"/>
-            <ac:spMk id="203" creationId="{A2CB33F7-9321-AFA5-A61A-313492A0A063}"/>
-          </ac:spMkLst>
-        </pc:spChg>
-        <pc:spChg chg="add mod">
-          <ac:chgData name="Hemma Philamore" userId="db50e2f3-17b2-4cc0-b719-fb6254d3e9df" providerId="ADAL" clId="{35C0B9A2-A60C-57EC-AD9B-630767BE11FE}" dt="2025-11-20T11:17:02.099" v="777" actId="1076"/>
-          <ac:spMkLst>
-            <pc:docMk/>
-            <pc:sldMk cId="2055881703" sldId="256"/>
-            <ac:spMk id="204" creationId="{F4439300-94E6-8176-3416-C61D7165FCF5}"/>
-          </ac:spMkLst>
-        </pc:spChg>
-        <pc:spChg chg="add mod">
-          <ac:chgData name="Hemma Philamore" userId="db50e2f3-17b2-4cc0-b719-fb6254d3e9df" providerId="ADAL" clId="{35C0B9A2-A60C-57EC-AD9B-630767BE11FE}" dt="2025-11-20T11:17:46.971" v="805" actId="1076"/>
-          <ac:spMkLst>
-            <pc:docMk/>
-            <pc:sldMk cId="2055881703" sldId="256"/>
-            <ac:spMk id="206" creationId="{34CBA40E-6EF2-6992-D994-1C304B64CDDF}"/>
-          </ac:spMkLst>
-        </pc:spChg>
-        <pc:spChg chg="add mod">
-          <ac:chgData name="Hemma Philamore" userId="db50e2f3-17b2-4cc0-b719-fb6254d3e9df" providerId="ADAL" clId="{35C0B9A2-A60C-57EC-AD9B-630767BE11FE}" dt="2025-11-20T11:17:36.858" v="803" actId="1076"/>
-          <ac:spMkLst>
-            <pc:docMk/>
-            <pc:sldMk cId="2055881703" sldId="256"/>
-            <ac:spMk id="207" creationId="{BFB4679D-0BD6-0A6C-80A2-30D32C1A6B01}"/>
-          </ac:spMkLst>
-        </pc:spChg>
-        <pc:grpChg chg="add mod">
-          <ac:chgData name="Hemma Philamore" userId="db50e2f3-17b2-4cc0-b719-fb6254d3e9df" providerId="ADAL" clId="{35C0B9A2-A60C-57EC-AD9B-630767BE11FE}" dt="2025-11-20T11:16:13.321" v="762" actId="1076"/>
-          <ac:grpSpMkLst>
-            <pc:docMk/>
-            <pc:sldMk cId="2055881703" sldId="256"/>
-            <ac:grpSpMk id="68" creationId="{EEA1CA30-B8FB-FE68-CEE3-E7126C2431BD}"/>
-          </ac:grpSpMkLst>
-        </pc:grpChg>
-        <pc:grpChg chg="add mod">
-          <ac:chgData name="Hemma Philamore" userId="db50e2f3-17b2-4cc0-b719-fb6254d3e9df" providerId="ADAL" clId="{35C0B9A2-A60C-57EC-AD9B-630767BE11FE}" dt="2025-11-20T10:55:33.903" v="532" actId="1076"/>
-          <ac:grpSpMkLst>
-            <pc:docMk/>
-            <pc:sldMk cId="2055881703" sldId="256"/>
-            <ac:grpSpMk id="127" creationId="{846CE7DB-EE05-C5C1-E4D3-5787214C4855}"/>
-          </ac:grpSpMkLst>
-        </pc:grpChg>
-        <pc:grpChg chg="add mod">
-          <ac:chgData name="Hemma Philamore" userId="db50e2f3-17b2-4cc0-b719-fb6254d3e9df" providerId="ADAL" clId="{35C0B9A2-A60C-57EC-AD9B-630767BE11FE}" dt="2025-11-20T10:58:03.554" v="583" actId="1076"/>
-          <ac:grpSpMkLst>
-            <pc:docMk/>
-            <pc:sldMk cId="2055881703" sldId="256"/>
-            <ac:grpSpMk id="128" creationId="{C964BE04-B984-584E-B9AC-09ED2F4375F1}"/>
-          </ac:grpSpMkLst>
-        </pc:grpChg>
-        <pc:grpChg chg="add mod">
-          <ac:chgData name="Hemma Philamore" userId="db50e2f3-17b2-4cc0-b719-fb6254d3e9df" providerId="ADAL" clId="{35C0B9A2-A60C-57EC-AD9B-630767BE11FE}" dt="2025-11-20T11:04:14.808" v="680" actId="1076"/>
-          <ac:grpSpMkLst>
-            <pc:docMk/>
-            <pc:sldMk cId="2055881703" sldId="256"/>
-            <ac:grpSpMk id="162" creationId="{175F5B84-092F-7D56-FC28-D6FEFC625480}"/>
-          </ac:grpSpMkLst>
-        </pc:grpChg>
-        <pc:grpChg chg="add mod">
-          <ac:chgData name="Hemma Philamore" userId="db50e2f3-17b2-4cc0-b719-fb6254d3e9df" providerId="ADAL" clId="{35C0B9A2-A60C-57EC-AD9B-630767BE11FE}" dt="2025-11-20T11:04:19.200" v="681" actId="1076"/>
-          <ac:grpSpMkLst>
-            <pc:docMk/>
-            <pc:sldMk cId="2055881703" sldId="256"/>
-            <ac:grpSpMk id="175" creationId="{6A069227-46EA-28D3-FAF3-4BF38A863E57}"/>
-          </ac:grpSpMkLst>
-        </pc:grpChg>
-        <pc:grpChg chg="mod">
-          <ac:chgData name="Hemma Philamore" userId="db50e2f3-17b2-4cc0-b719-fb6254d3e9df" providerId="ADAL" clId="{35C0B9A2-A60C-57EC-AD9B-630767BE11FE}" dt="2025-11-20T11:17:10.411" v="778" actId="1076"/>
-          <ac:grpSpMkLst>
-            <pc:docMk/>
-            <pc:sldMk cId="2055881703" sldId="256"/>
-            <ac:grpSpMk id="191" creationId="{D0DB04B9-3774-E353-ED89-26BC7CB0789D}"/>
-          </ac:grpSpMkLst>
-        </pc:grpChg>
-        <pc:grpChg chg="add mod">
-          <ac:chgData name="Hemma Philamore" userId="db50e2f3-17b2-4cc0-b719-fb6254d3e9df" providerId="ADAL" clId="{35C0B9A2-A60C-57EC-AD9B-630767BE11FE}" dt="2025-11-20T11:17:02.099" v="777" actId="1076"/>
-          <ac:grpSpMkLst>
-            <pc:docMk/>
-            <pc:sldMk cId="2055881703" sldId="256"/>
-            <ac:grpSpMk id="205" creationId="{A57266B0-3B60-B7C5-CD13-D5D6EEFAEF56}"/>
-          </ac:grpSpMkLst>
-        </pc:grpChg>
-        <pc:picChg chg="add mod modCrop">
-          <ac:chgData name="Hemma Philamore" userId="db50e2f3-17b2-4cc0-b719-fb6254d3e9df" providerId="ADAL" clId="{35C0B9A2-A60C-57EC-AD9B-630767BE11FE}" dt="2025-11-20T11:15:26.553" v="734" actId="1076"/>
-          <ac:picMkLst>
-            <pc:docMk/>
-            <pc:sldMk cId="2055881703" sldId="256"/>
-            <ac:picMk id="9" creationId="{BFBE6549-D519-7978-8C79-45C1CCF44A1A}"/>
-          </ac:picMkLst>
-        </pc:picChg>
-        <pc:picChg chg="add mod">
-          <ac:chgData name="Hemma Philamore" userId="db50e2f3-17b2-4cc0-b719-fb6254d3e9df" providerId="ADAL" clId="{35C0B9A2-A60C-57EC-AD9B-630767BE11FE}" dt="2025-11-20T11:15:26.553" v="734" actId="1076"/>
-          <ac:picMkLst>
-            <pc:docMk/>
-            <pc:sldMk cId="2055881703" sldId="256"/>
-            <ac:picMk id="11" creationId="{7108C697-452B-18F4-0A68-07969A8A41FE}"/>
-          </ac:picMkLst>
-        </pc:picChg>
-        <pc:cxnChg chg="add mod">
-          <ac:chgData name="Hemma Philamore" userId="db50e2f3-17b2-4cc0-b719-fb6254d3e9df" providerId="ADAL" clId="{35C0B9A2-A60C-57EC-AD9B-630767BE11FE}" dt="2025-11-20T11:15:26.553" v="734" actId="1076"/>
-          <ac:cxnSpMkLst>
-            <pc:docMk/>
-            <pc:sldMk cId="2055881703" sldId="256"/>
-            <ac:cxnSpMk id="25" creationId="{F3A2D803-B696-E12A-8C6D-559ECA86B8E1}"/>
-          </ac:cxnSpMkLst>
-        </pc:cxnChg>
-        <pc:cxnChg chg="add mod">
-          <ac:chgData name="Hemma Philamore" userId="db50e2f3-17b2-4cc0-b719-fb6254d3e9df" providerId="ADAL" clId="{35C0B9A2-A60C-57EC-AD9B-630767BE11FE}" dt="2025-11-20T10:41:54.165" v="233" actId="692"/>
-          <ac:cxnSpMkLst>
-            <pc:docMk/>
-            <pc:sldMk cId="2055881703" sldId="256"/>
-            <ac:cxnSpMk id="27" creationId="{08C849EA-9237-8EDA-598E-6BA8075F3426}"/>
-          </ac:cxnSpMkLst>
-        </pc:cxnChg>
-        <pc:cxnChg chg="add mod">
-          <ac:chgData name="Hemma Philamore" userId="db50e2f3-17b2-4cc0-b719-fb6254d3e9df" providerId="ADAL" clId="{35C0B9A2-A60C-57EC-AD9B-630767BE11FE}" dt="2025-11-20T10:41:43.386" v="227" actId="692"/>
-          <ac:cxnSpMkLst>
-            <pc:docMk/>
-            <pc:sldMk cId="2055881703" sldId="256"/>
-            <ac:cxnSpMk id="29" creationId="{CB206A3C-028A-6A69-9951-0FB7A3B526DB}"/>
-          </ac:cxnSpMkLst>
-        </pc:cxnChg>
-        <pc:cxnChg chg="add mod">
-          <ac:chgData name="Hemma Philamore" userId="db50e2f3-17b2-4cc0-b719-fb6254d3e9df" providerId="ADAL" clId="{35C0B9A2-A60C-57EC-AD9B-630767BE11FE}" dt="2025-11-20T10:48:13.639" v="406" actId="692"/>
-          <ac:cxnSpMkLst>
-            <pc:docMk/>
-            <pc:sldMk cId="2055881703" sldId="256"/>
-            <ac:cxnSpMk id="48" creationId="{D01AE3DB-03C1-C544-81CE-3DA73AA52629}"/>
-          </ac:cxnSpMkLst>
-        </pc:cxnChg>
-        <pc:cxnChg chg="add mod">
-          <ac:chgData name="Hemma Philamore" userId="db50e2f3-17b2-4cc0-b719-fb6254d3e9df" providerId="ADAL" clId="{35C0B9A2-A60C-57EC-AD9B-630767BE11FE}" dt="2025-11-20T10:50:40.617" v="456" actId="164"/>
-          <ac:cxnSpMkLst>
-            <pc:docMk/>
-            <pc:sldMk cId="2055881703" sldId="256"/>
-            <ac:cxnSpMk id="56" creationId="{366D8118-2718-AAA8-38A7-83275575D318}"/>
-          </ac:cxnSpMkLst>
-        </pc:cxnChg>
-        <pc:cxnChg chg="add mod">
-          <ac:chgData name="Hemma Philamore" userId="db50e2f3-17b2-4cc0-b719-fb6254d3e9df" providerId="ADAL" clId="{35C0B9A2-A60C-57EC-AD9B-630767BE11FE}" dt="2025-11-20T10:50:40.617" v="456" actId="164"/>
-          <ac:cxnSpMkLst>
-            <pc:docMk/>
-            <pc:sldMk cId="2055881703" sldId="256"/>
-            <ac:cxnSpMk id="67" creationId="{00C822D5-2BC3-CD28-1168-BB36C2CAABCA}"/>
-          </ac:cxnSpMkLst>
-        </pc:cxnChg>
-        <pc:cxnChg chg="mod topLvl">
-          <ac:chgData name="Hemma Philamore" userId="db50e2f3-17b2-4cc0-b719-fb6254d3e9df" providerId="ADAL" clId="{35C0B9A2-A60C-57EC-AD9B-630767BE11FE}" dt="2025-11-20T10:55:22.304" v="528" actId="164"/>
-          <ac:cxnSpMkLst>
-            <pc:docMk/>
-            <pc:sldMk cId="2055881703" sldId="256"/>
-            <ac:cxnSpMk id="79" creationId="{B9B60649-FEB6-60E8-713C-4CF2679B967C}"/>
-          </ac:cxnSpMkLst>
-        </pc:cxnChg>
-        <pc:cxnChg chg="add mod">
-          <ac:chgData name="Hemma Philamore" userId="db50e2f3-17b2-4cc0-b719-fb6254d3e9df" providerId="ADAL" clId="{35C0B9A2-A60C-57EC-AD9B-630767BE11FE}" dt="2025-11-20T10:55:22.304" v="528" actId="164"/>
-          <ac:cxnSpMkLst>
-            <pc:docMk/>
-            <pc:sldMk cId="2055881703" sldId="256"/>
-            <ac:cxnSpMk id="115" creationId="{A41AFC6E-AB1A-60A4-5299-D64AAA6BEA22}"/>
-          </ac:cxnSpMkLst>
-        </pc:cxnChg>
-        <pc:cxnChg chg="add mod">
-          <ac:chgData name="Hemma Philamore" userId="db50e2f3-17b2-4cc0-b719-fb6254d3e9df" providerId="ADAL" clId="{35C0B9A2-A60C-57EC-AD9B-630767BE11FE}" dt="2025-11-20T10:55:22.304" v="528" actId="164"/>
-          <ac:cxnSpMkLst>
-            <pc:docMk/>
-            <pc:sldMk cId="2055881703" sldId="256"/>
-            <ac:cxnSpMk id="118" creationId="{285143F3-B6EC-0563-5B2A-EC1531D96C5D}"/>
-          </ac:cxnSpMkLst>
-        </pc:cxnChg>
-        <pc:cxnChg chg="add mod">
-          <ac:chgData name="Hemma Philamore" userId="db50e2f3-17b2-4cc0-b719-fb6254d3e9df" providerId="ADAL" clId="{35C0B9A2-A60C-57EC-AD9B-630767BE11FE}" dt="2025-11-20T10:55:27.716" v="530" actId="164"/>
-          <ac:cxnSpMkLst>
-            <pc:docMk/>
-            <pc:sldMk cId="2055881703" sldId="256"/>
-            <ac:cxnSpMk id="121" creationId="{F237FABD-B7C9-05B5-CA13-D0C6D1B41743}"/>
-          </ac:cxnSpMkLst>
-        </pc:cxnChg>
-        <pc:cxnChg chg="add mod">
-          <ac:chgData name="Hemma Philamore" userId="db50e2f3-17b2-4cc0-b719-fb6254d3e9df" providerId="ADAL" clId="{35C0B9A2-A60C-57EC-AD9B-630767BE11FE}" dt="2025-11-20T10:55:27.716" v="530" actId="164"/>
-          <ac:cxnSpMkLst>
-            <pc:docMk/>
-            <pc:sldMk cId="2055881703" sldId="256"/>
-            <ac:cxnSpMk id="122" creationId="{7B925059-226C-361D-3565-43A5121596CA}"/>
-          </ac:cxnSpMkLst>
-        </pc:cxnChg>
-        <pc:cxnChg chg="add mod">
-          <ac:chgData name="Hemma Philamore" userId="db50e2f3-17b2-4cc0-b719-fb6254d3e9df" providerId="ADAL" clId="{35C0B9A2-A60C-57EC-AD9B-630767BE11FE}" dt="2025-11-20T10:55:27.716" v="530" actId="164"/>
-          <ac:cxnSpMkLst>
-            <pc:docMk/>
-            <pc:sldMk cId="2055881703" sldId="256"/>
-            <ac:cxnSpMk id="125" creationId="{70942A18-330D-8E8C-847C-8CB852D5233B}"/>
-          </ac:cxnSpMkLst>
-        </pc:cxnChg>
-        <pc:cxnChg chg="add mod">
-          <ac:chgData name="Hemma Philamore" userId="db50e2f3-17b2-4cc0-b719-fb6254d3e9df" providerId="ADAL" clId="{35C0B9A2-A60C-57EC-AD9B-630767BE11FE}" dt="2025-11-20T10:56:21.936" v="544" actId="1076"/>
-          <ac:cxnSpMkLst>
-            <pc:docMk/>
-            <pc:sldMk cId="2055881703" sldId="256"/>
-            <ac:cxnSpMk id="130" creationId="{6D589971-C856-01ED-B286-72C8BBFCA063}"/>
-          </ac:cxnSpMkLst>
-        </pc:cxnChg>
-        <pc:cxnChg chg="add mod">
-          <ac:chgData name="Hemma Philamore" userId="db50e2f3-17b2-4cc0-b719-fb6254d3e9df" providerId="ADAL" clId="{35C0B9A2-A60C-57EC-AD9B-630767BE11FE}" dt="2025-11-20T10:56:29.687" v="547" actId="1076"/>
-          <ac:cxnSpMkLst>
-            <pc:docMk/>
-            <pc:sldMk cId="2055881703" sldId="256"/>
-            <ac:cxnSpMk id="136" creationId="{A69A49EA-3D86-56C9-C3E0-048AD3BB55B9}"/>
-          </ac:cxnSpMkLst>
-        </pc:cxnChg>
-        <pc:cxnChg chg="mod">
-          <ac:chgData name="Hemma Philamore" userId="db50e2f3-17b2-4cc0-b719-fb6254d3e9df" providerId="ADAL" clId="{35C0B9A2-A60C-57EC-AD9B-630767BE11FE}" dt="2025-11-20T11:03:25.359" v="670" actId="14100"/>
-          <ac:cxnSpMkLst>
-            <pc:docMk/>
-            <pc:sldMk cId="2055881703" sldId="256"/>
-            <ac:cxnSpMk id="164" creationId="{65E71D2C-A502-04A0-D7B9-085567CFA387}"/>
-          </ac:cxnSpMkLst>
-        </pc:cxnChg>
-        <pc:cxnChg chg="mod">
-          <ac:chgData name="Hemma Philamore" userId="db50e2f3-17b2-4cc0-b719-fb6254d3e9df" providerId="ADAL" clId="{35C0B9A2-A60C-57EC-AD9B-630767BE11FE}" dt="2025-11-20T11:04:23.864" v="682" actId="1076"/>
-          <ac:cxnSpMkLst>
-            <pc:docMk/>
-            <pc:sldMk cId="2055881703" sldId="256"/>
-            <ac:cxnSpMk id="176" creationId="{004DAEC4-F304-35AE-2DD9-FD777493ED65}"/>
-          </ac:cxnSpMkLst>
-        </pc:cxnChg>
-        <pc:cxnChg chg="mod">
-          <ac:chgData name="Hemma Philamore" userId="db50e2f3-17b2-4cc0-b719-fb6254d3e9df" providerId="ADAL" clId="{35C0B9A2-A60C-57EC-AD9B-630767BE11FE}" dt="2025-11-20T11:04:02.726" v="677"/>
-          <ac:cxnSpMkLst>
-            <pc:docMk/>
-            <pc:sldMk cId="2055881703" sldId="256"/>
-            <ac:cxnSpMk id="177" creationId="{44E90D88-337A-7A4B-5BA3-43F7B94F273F}"/>
-          </ac:cxnSpMkLst>
-        </pc:cxnChg>
-        <pc:cxnChg chg="mod topLvl">
-          <ac:chgData name="Hemma Philamore" userId="db50e2f3-17b2-4cc0-b719-fb6254d3e9df" providerId="ADAL" clId="{35C0B9A2-A60C-57EC-AD9B-630767BE11FE}" dt="2025-11-20T11:17:02.099" v="777" actId="1076"/>
-          <ac:cxnSpMkLst>
-            <pc:docMk/>
-            <pc:sldMk cId="2055881703" sldId="256"/>
-            <ac:cxnSpMk id="195" creationId="{C943D3C3-4CDE-0431-BE97-E8A61359CF39}"/>
-          </ac:cxnSpMkLst>
-        </pc:cxnChg>
-        <pc:cxnChg chg="mod topLvl">
-          <ac:chgData name="Hemma Philamore" userId="db50e2f3-17b2-4cc0-b719-fb6254d3e9df" providerId="ADAL" clId="{35C0B9A2-A60C-57EC-AD9B-630767BE11FE}" dt="2025-11-20T11:16:51.457" v="774" actId="164"/>
-          <ac:cxnSpMkLst>
-            <pc:docMk/>
-            <pc:sldMk cId="2055881703" sldId="256"/>
-            <ac:cxnSpMk id="196" creationId="{F5430A0B-CF82-E6C8-9F8A-D340DE0021C2}"/>
-          </ac:cxnSpMkLst>
-        </pc:cxnChg>
-      </pc:sldChg>
-      <pc:sldChg chg="addSp modSp new mod">
-        <pc:chgData name="Hemma Philamore" userId="db50e2f3-17b2-4cc0-b719-fb6254d3e9df" providerId="ADAL" clId="{35C0B9A2-A60C-57EC-AD9B-630767BE11FE}" dt="2025-11-21T11:36:54.126" v="836" actId="164"/>
-        <pc:sldMkLst>
-          <pc:docMk/>
-          <pc:sldMk cId="2685824241" sldId="258"/>
-        </pc:sldMkLst>
-        <pc:spChg chg="add mod">
-          <ac:chgData name="Hemma Philamore" userId="db50e2f3-17b2-4cc0-b719-fb6254d3e9df" providerId="ADAL" clId="{35C0B9A2-A60C-57EC-AD9B-630767BE11FE}" dt="2025-11-21T11:36:54.126" v="836" actId="164"/>
-          <ac:spMkLst>
-            <pc:docMk/>
-            <pc:sldMk cId="2685824241" sldId="258"/>
-            <ac:spMk id="4" creationId="{D64F7677-80AE-515B-668E-F2A587B1182F}"/>
-          </ac:spMkLst>
-        </pc:spChg>
-        <pc:spChg chg="add mod">
-          <ac:chgData name="Hemma Philamore" userId="db50e2f3-17b2-4cc0-b719-fb6254d3e9df" providerId="ADAL" clId="{35C0B9A2-A60C-57EC-AD9B-630767BE11FE}" dt="2025-11-21T11:36:54.126" v="836" actId="164"/>
-          <ac:spMkLst>
-            <pc:docMk/>
-            <pc:sldMk cId="2685824241" sldId="258"/>
-            <ac:spMk id="5" creationId="{33757D97-6040-B0C9-BD6F-5DD1E40009DF}"/>
-          </ac:spMkLst>
-        </pc:spChg>
-        <pc:spChg chg="add mod">
-          <ac:chgData name="Hemma Philamore" userId="db50e2f3-17b2-4cc0-b719-fb6254d3e9df" providerId="ADAL" clId="{35C0B9A2-A60C-57EC-AD9B-630767BE11FE}" dt="2025-11-21T11:36:54.126" v="836" actId="164"/>
-          <ac:spMkLst>
-            <pc:docMk/>
-            <pc:sldMk cId="2685824241" sldId="258"/>
-            <ac:spMk id="6" creationId="{B215BF08-B734-CFE6-46EF-88B92217A256}"/>
-          </ac:spMkLst>
-        </pc:spChg>
-        <pc:grpChg chg="add mod">
-          <ac:chgData name="Hemma Philamore" userId="db50e2f3-17b2-4cc0-b719-fb6254d3e9df" providerId="ADAL" clId="{35C0B9A2-A60C-57EC-AD9B-630767BE11FE}" dt="2025-11-21T11:36:54.126" v="836" actId="164"/>
-          <ac:grpSpMkLst>
-            <pc:docMk/>
-            <pc:sldMk cId="2685824241" sldId="258"/>
-            <ac:grpSpMk id="7" creationId="{8896DDB5-3AA7-1C0D-7342-3DC59EE9E742}"/>
-          </ac:grpSpMkLst>
-        </pc:grpChg>
-        <pc:picChg chg="add mod modCrop">
-          <ac:chgData name="Hemma Philamore" userId="db50e2f3-17b2-4cc0-b719-fb6254d3e9df" providerId="ADAL" clId="{35C0B9A2-A60C-57EC-AD9B-630767BE11FE}" dt="2025-11-21T11:36:54.126" v="836" actId="164"/>
-          <ac:picMkLst>
-            <pc:docMk/>
-            <pc:sldMk cId="2685824241" sldId="258"/>
-            <ac:picMk id="3" creationId="{05CE4694-1E06-C695-7357-76A4AE7720EF}"/>
-          </ac:picMkLst>
-        </pc:picChg>
       </pc:sldChg>
     </pc:docChg>
   </pc:docChgLst>
@@ -1186,7 +325,7 @@
           <a:p>
             <a:fld id="{24C539BA-54A7-0D48-93B9-3DB7468E8C1A}" type="datetimeFigureOut">
               <a:rPr lang="en-US" smtClean="0"/>
-              <a:t>11/25/25</a:t>
+              <a:t>10/2/26</a:t>
             </a:fld>
             <a:endParaRPr lang="en-US"/>
           </a:p>
@@ -1386,7 +525,7 @@
           <a:p>
             <a:fld id="{24C539BA-54A7-0D48-93B9-3DB7468E8C1A}" type="datetimeFigureOut">
               <a:rPr lang="en-US" smtClean="0"/>
-              <a:t>11/25/25</a:t>
+              <a:t>10/2/26</a:t>
             </a:fld>
             <a:endParaRPr lang="en-US"/>
           </a:p>
@@ -1596,7 +735,7 @@
           <a:p>
             <a:fld id="{24C539BA-54A7-0D48-93B9-3DB7468E8C1A}" type="datetimeFigureOut">
               <a:rPr lang="en-US" smtClean="0"/>
-              <a:t>11/25/25</a:t>
+              <a:t>10/2/26</a:t>
             </a:fld>
             <a:endParaRPr lang="en-US"/>
           </a:p>
@@ -1796,7 +935,7 @@
           <a:p>
             <a:fld id="{24C539BA-54A7-0D48-93B9-3DB7468E8C1A}" type="datetimeFigureOut">
               <a:rPr lang="en-US" smtClean="0"/>
-              <a:t>11/25/25</a:t>
+              <a:t>10/2/26</a:t>
             </a:fld>
             <a:endParaRPr lang="en-US"/>
           </a:p>
@@ -2072,7 +1211,7 @@
           <a:p>
             <a:fld id="{24C539BA-54A7-0D48-93B9-3DB7468E8C1A}" type="datetimeFigureOut">
               <a:rPr lang="en-US" smtClean="0"/>
-              <a:t>11/25/25</a:t>
+              <a:t>10/2/26</a:t>
             </a:fld>
             <a:endParaRPr lang="en-US"/>
           </a:p>
@@ -2340,7 +1479,7 @@
           <a:p>
             <a:fld id="{24C539BA-54A7-0D48-93B9-3DB7468E8C1A}" type="datetimeFigureOut">
               <a:rPr lang="en-US" smtClean="0"/>
-              <a:t>11/25/25</a:t>
+              <a:t>10/2/26</a:t>
             </a:fld>
             <a:endParaRPr lang="en-US"/>
           </a:p>
@@ -2755,7 +1894,7 @@
           <a:p>
             <a:fld id="{24C539BA-54A7-0D48-93B9-3DB7468E8C1A}" type="datetimeFigureOut">
               <a:rPr lang="en-US" smtClean="0"/>
-              <a:t>11/25/25</a:t>
+              <a:t>10/2/26</a:t>
             </a:fld>
             <a:endParaRPr lang="en-US"/>
           </a:p>
@@ -2897,7 +2036,7 @@
           <a:p>
             <a:fld id="{24C539BA-54A7-0D48-93B9-3DB7468E8C1A}" type="datetimeFigureOut">
               <a:rPr lang="en-US" smtClean="0"/>
-              <a:t>11/25/25</a:t>
+              <a:t>10/2/26</a:t>
             </a:fld>
             <a:endParaRPr lang="en-US"/>
           </a:p>
@@ -3010,7 +2149,7 @@
           <a:p>
             <a:fld id="{24C539BA-54A7-0D48-93B9-3DB7468E8C1A}" type="datetimeFigureOut">
               <a:rPr lang="en-US" smtClean="0"/>
-              <a:t>11/25/25</a:t>
+              <a:t>10/2/26</a:t>
             </a:fld>
             <a:endParaRPr lang="en-US"/>
           </a:p>
@@ -3323,7 +2462,7 @@
           <a:p>
             <a:fld id="{24C539BA-54A7-0D48-93B9-3DB7468E8C1A}" type="datetimeFigureOut">
               <a:rPr lang="en-US" smtClean="0"/>
-              <a:t>11/25/25</a:t>
+              <a:t>10/2/26</a:t>
             </a:fld>
             <a:endParaRPr lang="en-US"/>
           </a:p>
@@ -3612,7 +2751,7 @@
           <a:p>
             <a:fld id="{24C539BA-54A7-0D48-93B9-3DB7468E8C1A}" type="datetimeFigureOut">
               <a:rPr lang="en-US" smtClean="0"/>
-              <a:t>11/25/25</a:t>
+              <a:t>10/2/26</a:t>
             </a:fld>
             <a:endParaRPr lang="en-US"/>
           </a:p>
@@ -3855,7 +2994,7 @@
           <a:p>
             <a:fld id="{24C539BA-54A7-0D48-93B9-3DB7468E8C1A}" type="datetimeFigureOut">
               <a:rPr lang="en-US" smtClean="0"/>
-              <a:t>11/25/25</a:t>
+              <a:t>10/2/26</a:t>
             </a:fld>
             <a:endParaRPr lang="en-US"/>
           </a:p>
@@ -4701,6 +3840,7 @@
                         <m:ctrlPr>
                           <a:rPr lang="en-GB" sz="1100" b="0" i="1" smtClean="0">
                             <a:latin typeface="Cambria Math" panose="02040503050406030204" pitchFamily="18" charset="0"/>
+                            <a:ea typeface="Cambria Math" panose="02040503050406030204" pitchFamily="18" charset="0"/>
                           </a:rPr>
                         </m:ctrlPr>
                       </m:fPr>
@@ -4827,6 +3967,7 @@
                         <m:ctrlPr>
                           <a:rPr lang="en-GB" sz="1100" b="0" i="1" smtClean="0">
                             <a:latin typeface="Cambria Math" panose="02040503050406030204" pitchFamily="18" charset="0"/>
+                            <a:ea typeface="Cambria Math" panose="02040503050406030204" pitchFamily="18" charset="0"/>
                           </a:rPr>
                         </m:ctrlPr>
                       </m:fPr>
@@ -5053,8 +4194,8 @@
           </a:fontRef>
         </p:style>
       </p:cxnSp>
-      <mc:AlternateContent xmlns:mc="http://schemas.openxmlformats.org/markup-compatibility/2006">
-        <mc:Choice xmlns:a14="http://schemas.microsoft.com/office/drawing/2010/main" Requires="a14">
+      <mc:AlternateContent xmlns:mc="http://schemas.openxmlformats.org/markup-compatibility/2006" xmlns:a14="http://schemas.microsoft.com/office/drawing/2010/main">
+        <mc:Choice Requires="a14">
           <p:sp>
             <p:nvSpPr>
               <p:cNvPr id="54" name="TextBox 53">
@@ -5113,7 +4254,7 @@
             </p:txBody>
           </p:sp>
         </mc:Choice>
-        <mc:Fallback>
+        <mc:Fallback xmlns="">
           <p:sp>
             <p:nvSpPr>
               <p:cNvPr id="54" name="TextBox 53">
@@ -5334,14 +4475,11 @@
                 <a:pPr/>
                 <a14:m>
                   <m:oMathPara xmlns:m="http://schemas.openxmlformats.org/officeDocument/2006/math">
-                    <m:oMathParaPr>
-                      <m:jc m:val="centerGroup"/>
-                    </m:oMathParaPr>
-                    <m:oMath xmlns:m="http://schemas.openxmlformats.org/officeDocument/2006/math">
+                    <m:oMath>
                       <m:sSub>
                         <m:sSubPr>
                           <m:ctrlPr>
-                            <a:rPr lang="en-US" sz="1200" i="1" smtClean="0">
+                            <a:rPr lang="en-GB" sz="1200" b="0" i="1" smtClean="0">
                               <a:latin typeface="Cambria Math" panose="02040503050406030204" pitchFamily="18" charset="0"/>
                             </a:rPr>
                           </m:ctrlPr>
@@ -5449,14 +4587,11 @@
                 <a:pPr/>
                 <a14:m>
                   <m:oMathPara xmlns:m="http://schemas.openxmlformats.org/officeDocument/2006/math">
-                    <m:oMathParaPr>
-                      <m:jc m:val="centerGroup"/>
-                    </m:oMathParaPr>
-                    <m:oMath xmlns:m="http://schemas.openxmlformats.org/officeDocument/2006/math">
+                    <m:oMath>
                       <m:sSub>
                         <m:sSubPr>
                           <m:ctrlPr>
-                            <a:rPr lang="en-US" sz="1200" i="1" smtClean="0">
+                            <a:rPr lang="en-GB" sz="1200" b="0" i="1" smtClean="0">
                               <a:latin typeface="Cambria Math" panose="02040503050406030204" pitchFamily="18" charset="0"/>
                             </a:rPr>
                           </m:ctrlPr>
@@ -5564,14 +4699,11 @@
                 <a:pPr/>
                 <a14:m>
                   <m:oMathPara xmlns:m="http://schemas.openxmlformats.org/officeDocument/2006/math">
-                    <m:oMathParaPr>
-                      <m:jc m:val="centerGroup"/>
-                    </m:oMathParaPr>
-                    <m:oMath xmlns:m="http://schemas.openxmlformats.org/officeDocument/2006/math">
+                    <m:oMath>
                       <m:sSub>
                         <m:sSubPr>
                           <m:ctrlPr>
-                            <a:rPr lang="en-US" sz="1200" i="1" smtClean="0">
+                            <a:rPr lang="en-GB" sz="1200" b="0" i="1" smtClean="0">
                               <a:latin typeface="Cambria Math" panose="02040503050406030204" pitchFamily="18" charset="0"/>
                             </a:rPr>
                           </m:ctrlPr>
@@ -5679,14 +4811,11 @@
                 <a:pPr/>
                 <a14:m>
                   <m:oMathPara xmlns:m="http://schemas.openxmlformats.org/officeDocument/2006/math">
-                    <m:oMathParaPr>
-                      <m:jc m:val="centerGroup"/>
-                    </m:oMathParaPr>
-                    <m:oMath xmlns:m="http://schemas.openxmlformats.org/officeDocument/2006/math">
+                    <m:oMath>
                       <m:sSub>
                         <m:sSubPr>
                           <m:ctrlPr>
-                            <a:rPr lang="en-US" sz="1200" i="1" smtClean="0">
+                            <a:rPr lang="en-GB" sz="1200" b="0" i="1" smtClean="0">
                               <a:latin typeface="Cambria Math" panose="02040503050406030204" pitchFamily="18" charset="0"/>
                             </a:rPr>
                           </m:ctrlPr>
@@ -6144,14 +5273,11 @@
                 <a:pPr/>
                 <a14:m>
                   <m:oMathPara xmlns:m="http://schemas.openxmlformats.org/officeDocument/2006/math">
-                    <m:oMathParaPr>
-                      <m:jc m:val="centerGroup"/>
-                    </m:oMathParaPr>
-                    <m:oMath xmlns:m="http://schemas.openxmlformats.org/officeDocument/2006/math">
+                    <m:oMath>
                       <m:sSub>
                         <m:sSubPr>
                           <m:ctrlPr>
-                            <a:rPr lang="en-US" sz="1200" i="1" smtClean="0">
+                            <a:rPr lang="en-GB" sz="1200" b="0" i="1" smtClean="0">
                               <a:latin typeface="Cambria Math" panose="02040503050406030204" pitchFamily="18" charset="0"/>
                             </a:rPr>
                           </m:ctrlPr>
@@ -6259,14 +5385,11 @@
                 <a:pPr/>
                 <a14:m>
                   <m:oMathPara xmlns:m="http://schemas.openxmlformats.org/officeDocument/2006/math">
-                    <m:oMathParaPr>
-                      <m:jc m:val="centerGroup"/>
-                    </m:oMathParaPr>
-                    <m:oMath xmlns:m="http://schemas.openxmlformats.org/officeDocument/2006/math">
+                    <m:oMath>
                       <m:sSub>
                         <m:sSubPr>
                           <m:ctrlPr>
-                            <a:rPr lang="en-US" sz="1200" i="1" smtClean="0">
+                            <a:rPr lang="en-GB" sz="1200" b="0" i="1" smtClean="0">
                               <a:latin typeface="Cambria Math" panose="02040503050406030204" pitchFamily="18" charset="0"/>
                             </a:rPr>
                           </m:ctrlPr>
@@ -6374,14 +5497,11 @@
                 <a:pPr/>
                 <a14:m>
                   <m:oMathPara xmlns:m="http://schemas.openxmlformats.org/officeDocument/2006/math">
-                    <m:oMathParaPr>
-                      <m:jc m:val="centerGroup"/>
-                    </m:oMathParaPr>
-                    <m:oMath xmlns:m="http://schemas.openxmlformats.org/officeDocument/2006/math">
+                    <m:oMath>
                       <m:sSub>
                         <m:sSubPr>
                           <m:ctrlPr>
-                            <a:rPr lang="en-US" sz="1200" i="1" smtClean="0">
+                            <a:rPr lang="en-GB" sz="1200" b="0" i="1" smtClean="0">
                               <a:latin typeface="Cambria Math" panose="02040503050406030204" pitchFamily="18" charset="0"/>
                             </a:rPr>
                           </m:ctrlPr>
@@ -6489,14 +5609,11 @@
                 <a:pPr/>
                 <a14:m>
                   <m:oMathPara xmlns:m="http://schemas.openxmlformats.org/officeDocument/2006/math">
-                    <m:oMathParaPr>
-                      <m:jc m:val="centerGroup"/>
-                    </m:oMathParaPr>
-                    <m:oMath xmlns:m="http://schemas.openxmlformats.org/officeDocument/2006/math">
+                    <m:oMath>
                       <m:sSub>
                         <m:sSubPr>
                           <m:ctrlPr>
-                            <a:rPr lang="en-US" sz="1200" i="1" smtClean="0">
+                            <a:rPr lang="en-GB" sz="1200" b="0" i="1" smtClean="0">
                               <a:latin typeface="Cambria Math" panose="02040503050406030204" pitchFamily="18" charset="0"/>
                             </a:rPr>
                           </m:ctrlPr>
@@ -6954,14 +6071,11 @@
                 <a:pPr/>
                 <a14:m>
                   <m:oMathPara xmlns:m="http://schemas.openxmlformats.org/officeDocument/2006/math">
-                    <m:oMathParaPr>
-                      <m:jc m:val="centerGroup"/>
-                    </m:oMathParaPr>
-                    <m:oMath xmlns:m="http://schemas.openxmlformats.org/officeDocument/2006/math">
+                    <m:oMath>
                       <m:sSub>
                         <m:sSubPr>
                           <m:ctrlPr>
-                            <a:rPr lang="en-US" sz="1200" i="1" smtClean="0">
+                            <a:rPr lang="en-GB" sz="1200" b="0" i="1" smtClean="0">
                               <a:latin typeface="Cambria Math" panose="02040503050406030204" pitchFamily="18" charset="0"/>
                             </a:rPr>
                           </m:ctrlPr>
@@ -7069,14 +6183,11 @@
                 <a:pPr/>
                 <a14:m>
                   <m:oMathPara xmlns:m="http://schemas.openxmlformats.org/officeDocument/2006/math">
-                    <m:oMathParaPr>
-                      <m:jc m:val="centerGroup"/>
-                    </m:oMathParaPr>
-                    <m:oMath xmlns:m="http://schemas.openxmlformats.org/officeDocument/2006/math">
+                    <m:oMath>
                       <m:sSub>
                         <m:sSubPr>
                           <m:ctrlPr>
-                            <a:rPr lang="en-US" sz="1200" i="1" smtClean="0">
+                            <a:rPr lang="en-GB" sz="1200" b="0" i="1" smtClean="0">
                               <a:latin typeface="Cambria Math" panose="02040503050406030204" pitchFamily="18" charset="0"/>
                             </a:rPr>
                           </m:ctrlPr>
@@ -7184,14 +6295,11 @@
                 <a:pPr/>
                 <a14:m>
                   <m:oMathPara xmlns:m="http://schemas.openxmlformats.org/officeDocument/2006/math">
-                    <m:oMathParaPr>
-                      <m:jc m:val="centerGroup"/>
-                    </m:oMathParaPr>
-                    <m:oMath xmlns:m="http://schemas.openxmlformats.org/officeDocument/2006/math">
+                    <m:oMath>
                       <m:sSub>
                         <m:sSubPr>
                           <m:ctrlPr>
-                            <a:rPr lang="en-US" sz="1200" i="1" smtClean="0">
+                            <a:rPr lang="en-GB" sz="1200" b="0" i="1" smtClean="0">
                               <a:latin typeface="Cambria Math" panose="02040503050406030204" pitchFamily="18" charset="0"/>
                             </a:rPr>
                           </m:ctrlPr>
@@ -7299,14 +6407,11 @@
                 <a:pPr/>
                 <a14:m>
                   <m:oMathPara xmlns:m="http://schemas.openxmlformats.org/officeDocument/2006/math">
-                    <m:oMathParaPr>
-                      <m:jc m:val="centerGroup"/>
-                    </m:oMathParaPr>
-                    <m:oMath xmlns:m="http://schemas.openxmlformats.org/officeDocument/2006/math">
+                    <m:oMath>
                       <m:sSub>
                         <m:sSubPr>
                           <m:ctrlPr>
-                            <a:rPr lang="en-US" sz="1200" i="1" smtClean="0">
+                            <a:rPr lang="en-GB" sz="1200" b="0" i="1" smtClean="0">
                               <a:latin typeface="Cambria Math" panose="02040503050406030204" pitchFamily="18" charset="0"/>
                             </a:rPr>
                           </m:ctrlPr>
@@ -9074,14 +8179,11 @@
                 <a:pPr/>
                 <a14:m>
                   <m:oMathPara xmlns:m="http://schemas.openxmlformats.org/officeDocument/2006/math">
-                    <m:oMathParaPr>
-                      <m:jc m:val="centerGroup"/>
-                    </m:oMathParaPr>
-                    <m:oMath xmlns:m="http://schemas.openxmlformats.org/officeDocument/2006/math">
+                    <m:oMath>
                       <m:sSub>
                         <m:sSubPr>
                           <m:ctrlPr>
-                            <a:rPr lang="en-US" sz="1200" i="1" smtClean="0">
+                            <a:rPr lang="en-GB" sz="1200" b="0" i="1" smtClean="0">
                               <a:latin typeface="Cambria Math" panose="02040503050406030204" pitchFamily="18" charset="0"/>
                             </a:rPr>
                           </m:ctrlPr>
@@ -9189,14 +8291,11 @@
                 <a:pPr/>
                 <a14:m>
                   <m:oMathPara xmlns:m="http://schemas.openxmlformats.org/officeDocument/2006/math">
-                    <m:oMathParaPr>
-                      <m:jc m:val="centerGroup"/>
-                    </m:oMathParaPr>
-                    <m:oMath xmlns:m="http://schemas.openxmlformats.org/officeDocument/2006/math">
+                    <m:oMath>
                       <m:sSub>
                         <m:sSubPr>
                           <m:ctrlPr>
-                            <a:rPr lang="en-US" sz="1200" i="1" smtClean="0">
+                            <a:rPr lang="en-GB" sz="1200" b="0" i="1" smtClean="0">
                               <a:latin typeface="Cambria Math" panose="02040503050406030204" pitchFamily="18" charset="0"/>
                             </a:rPr>
                           </m:ctrlPr>
@@ -9304,14 +8403,11 @@
                 <a:pPr/>
                 <a14:m>
                   <m:oMathPara xmlns:m="http://schemas.openxmlformats.org/officeDocument/2006/math">
-                    <m:oMathParaPr>
-                      <m:jc m:val="centerGroup"/>
-                    </m:oMathParaPr>
-                    <m:oMath xmlns:m="http://schemas.openxmlformats.org/officeDocument/2006/math">
+                    <m:oMath>
                       <m:sSub>
                         <m:sSubPr>
                           <m:ctrlPr>
-                            <a:rPr lang="en-US" sz="1200" i="1" smtClean="0">
+                            <a:rPr lang="en-GB" sz="1200" b="0" i="1" smtClean="0">
                               <a:latin typeface="Cambria Math" panose="02040503050406030204" pitchFamily="18" charset="0"/>
                             </a:rPr>
                           </m:ctrlPr>
@@ -9482,14 +8578,11 @@
                   <a:pPr/>
                   <a14:m>
                     <m:oMathPara xmlns:m="http://schemas.openxmlformats.org/officeDocument/2006/math">
-                      <m:oMathParaPr>
-                        <m:jc m:val="centerGroup"/>
-                      </m:oMathParaPr>
-                      <m:oMath xmlns:m="http://schemas.openxmlformats.org/officeDocument/2006/math">
+                      <m:oMath>
                         <m:sSub>
                           <m:sSubPr>
                             <m:ctrlPr>
-                              <a:rPr lang="en-US" sz="1200" i="1" smtClean="0">
+                              <a:rPr lang="en-GB" sz="1200" b="0" i="1" smtClean="0">
                                 <a:latin typeface="Cambria Math" panose="02040503050406030204" pitchFamily="18" charset="0"/>
                               </a:rPr>
                             </m:ctrlPr>
@@ -10246,10 +9339,7 @@
                   <a:pPr/>
                   <a14:m>
                     <m:oMathPara xmlns:m="http://schemas.openxmlformats.org/officeDocument/2006/math">
-                      <m:oMathParaPr>
-                        <m:jc m:val="centerGroup"/>
-                      </m:oMathParaPr>
-                      <m:oMath xmlns:m="http://schemas.openxmlformats.org/officeDocument/2006/math">
+                      <m:oMath>
                         <m:r>
                           <a:rPr lang="en-GB" i="1" smtClean="0">
                             <a:latin typeface="Cambria Math" panose="02040503050406030204" pitchFamily="18" charset="0"/>
@@ -10348,14 +9438,11 @@
                 <a:pPr/>
                 <a14:m>
                   <m:oMathPara xmlns:m="http://schemas.openxmlformats.org/officeDocument/2006/math">
-                    <m:oMathParaPr>
-                      <m:jc m:val="centerGroup"/>
-                    </m:oMathParaPr>
-                    <m:oMath xmlns:m="http://schemas.openxmlformats.org/officeDocument/2006/math">
+                    <m:oMath>
                       <m:sSub>
                         <m:sSubPr>
                           <m:ctrlPr>
-                            <a:rPr lang="en-US" i="1">
+                            <a:rPr lang="en-GB" i="1">
                               <a:latin typeface="Cambria Math" panose="02040503050406030204" pitchFamily="18" charset="0"/>
                             </a:rPr>
                           </m:ctrlPr>
@@ -10373,7 +9460,7 @@
                             <a:rPr lang="en-GB" i="1">
                               <a:latin typeface="Cambria Math" charset="0"/>
                             </a:rPr>
-                            <m:t>𝑤h𝑒𝑒𝑙</m:t>
+                            <m:t>𝑤ℎ𝑒𝑒𝑙</m:t>
                           </m:r>
                         </m:sub>
                       </m:sSub>
@@ -10626,6 +9713,262 @@
     <p:extLst>
       <p:ext uri="{BB962C8B-B14F-4D97-AF65-F5344CB8AC3E}">
         <p14:creationId xmlns:p14="http://schemas.microsoft.com/office/powerpoint/2010/main" val="2685824241"/>
+      </p:ext>
+    </p:extLst>
+  </p:cSld>
+  <p:clrMapOvr>
+    <a:masterClrMapping/>
+  </p:clrMapOvr>
+</p:sld>
+</file>
+
+<file path=ppt/slides/slide4.xml><?xml version="1.0" encoding="utf-8"?>
+<p:sld xmlns:a="http://schemas.openxmlformats.org/drawingml/2006/main" xmlns:r="http://schemas.openxmlformats.org/officeDocument/2006/relationships" xmlns:p="http://schemas.openxmlformats.org/presentationml/2006/main">
+  <p:cSld>
+    <p:spTree>
+      <p:nvGrpSpPr>
+        <p:cNvPr id="1" name=""/>
+        <p:cNvGrpSpPr/>
+        <p:nvPr/>
+      </p:nvGrpSpPr>
+      <p:grpSpPr>
+        <a:xfrm>
+          <a:off x="0" y="0"/>
+          <a:ext cx="0" cy="0"/>
+          <a:chOff x="0" y="0"/>
+          <a:chExt cx="0" cy="0"/>
+        </a:xfrm>
+      </p:grpSpPr>
+      <p:graphicFrame>
+        <p:nvGraphicFramePr>
+          <p:cNvPr id="2" name="Table 1">
+            <a:extLst>
+              <a:ext uri="{FF2B5EF4-FFF2-40B4-BE49-F238E27FC236}">
+                <a16:creationId xmlns:a16="http://schemas.microsoft.com/office/drawing/2014/main" id="{139529C0-10FD-CB04-F0FC-BBBE8A4E2886}"/>
+              </a:ext>
+            </a:extLst>
+          </p:cNvPr>
+          <p:cNvGraphicFramePr>
+            <a:graphicFrameLocks noGrp="1"/>
+          </p:cNvGraphicFramePr>
+          <p:nvPr>
+            <p:extLst>
+              <p:ext uri="{D42A27DB-BD31-4B8C-83A1-F6EECF244321}">
+                <p14:modId xmlns:p14="http://schemas.microsoft.com/office/powerpoint/2010/main" val="3631853501"/>
+              </p:ext>
+            </p:extLst>
+          </p:nvPr>
+        </p:nvGraphicFramePr>
+        <p:xfrm>
+          <a:off x="547444" y="2687320"/>
+          <a:ext cx="5175624" cy="741680"/>
+        </p:xfrm>
+        <a:graphic>
+          <a:graphicData uri="http://schemas.openxmlformats.org/drawingml/2006/table">
+            <a:tbl>
+              <a:tblPr firstRow="1" bandRow="1">
+                <a:tableStyleId>{073A0DAA-6AF3-43AB-8588-CEC1D06C72B9}</a:tableStyleId>
+              </a:tblPr>
+              <a:tblGrid>
+                <a:gridCol w="1249082">
+                  <a:extLst>
+                    <a:ext uri="{9D8B030D-6E8A-4147-A177-3AD203B41FA5}">
+                      <a16:colId xmlns:a16="http://schemas.microsoft.com/office/drawing/2014/main" val="3433321318"/>
+                    </a:ext>
+                  </a:extLst>
+                </a:gridCol>
+                <a:gridCol w="1323191">
+                  <a:extLst>
+                    <a:ext uri="{9D8B030D-6E8A-4147-A177-3AD203B41FA5}">
+                      <a16:colId xmlns:a16="http://schemas.microsoft.com/office/drawing/2014/main" val="781029571"/>
+                    </a:ext>
+                  </a:extLst>
+                </a:gridCol>
+                <a:gridCol w="1301675">
+                  <a:extLst>
+                    <a:ext uri="{9D8B030D-6E8A-4147-A177-3AD203B41FA5}">
+                      <a16:colId xmlns:a16="http://schemas.microsoft.com/office/drawing/2014/main" val="2968892054"/>
+                    </a:ext>
+                  </a:extLst>
+                </a:gridCol>
+                <a:gridCol w="1301676">
+                  <a:extLst>
+                    <a:ext uri="{9D8B030D-6E8A-4147-A177-3AD203B41FA5}">
+                      <a16:colId xmlns:a16="http://schemas.microsoft.com/office/drawing/2014/main" val="2443185042"/>
+                    </a:ext>
+                  </a:extLst>
+                </a:gridCol>
+              </a:tblGrid>
+              <a:tr h="370840">
+                <a:tc>
+                  <a:txBody>
+                    <a:bodyPr/>
+                    <a:lstStyle/>
+                    <a:p>
+                      <a:pPr algn="ctr"/>
+                      <a:r>
+                        <a:rPr lang="en-US" dirty="0"/>
+                        <a:t>0</a:t>
+                      </a:r>
+                    </a:p>
+                  </a:txBody>
+                  <a:tcPr/>
+                </a:tc>
+                <a:tc>
+                  <a:txBody>
+                    <a:bodyPr/>
+                    <a:lstStyle/>
+                    <a:p>
+                      <a:pPr algn="ctr"/>
+                      <a:r>
+                        <a:rPr lang="en-US" dirty="0"/>
+                        <a:t>1</a:t>
+                      </a:r>
+                    </a:p>
+                  </a:txBody>
+                  <a:tcPr/>
+                </a:tc>
+                <a:tc>
+                  <a:txBody>
+                    <a:bodyPr/>
+                    <a:lstStyle/>
+                    <a:p>
+                      <a:pPr algn="ctr"/>
+                      <a:r>
+                        <a:rPr lang="en-US" dirty="0"/>
+                        <a:t>2</a:t>
+                      </a:r>
+                    </a:p>
+                  </a:txBody>
+                  <a:tcPr/>
+                </a:tc>
+                <a:tc>
+                  <a:txBody>
+                    <a:bodyPr/>
+                    <a:lstStyle/>
+                    <a:p>
+                      <a:pPr algn="ctr"/>
+                      <a:r>
+                        <a:rPr lang="en-US" dirty="0"/>
+                        <a:t>3</a:t>
+                      </a:r>
+                    </a:p>
+                  </a:txBody>
+                  <a:tcPr/>
+                </a:tc>
+                <a:extLst>
+                  <a:ext uri="{0D108BD9-81ED-4DB2-BD59-A6C34878D82A}">
+                    <a16:rowId xmlns:a16="http://schemas.microsoft.com/office/drawing/2014/main" val="1876089487"/>
+                  </a:ext>
+                </a:extLst>
+              </a:tr>
+              <a:tr h="370840">
+                <a:tc>
+                  <a:txBody>
+                    <a:bodyPr/>
+                    <a:lstStyle/>
+                    <a:p>
+                      <a:pPr algn="ctr"/>
+                      <a:r>
+                        <a:rPr lang="en-US" dirty="0"/>
+                        <a:t>Rosie</a:t>
+                      </a:r>
+                    </a:p>
+                  </a:txBody>
+                  <a:tcPr/>
+                </a:tc>
+                <a:tc>
+                  <a:txBody>
+                    <a:bodyPr/>
+                    <a:lstStyle/>
+                    <a:p>
+                      <a:pPr algn="ctr"/>
+                      <a:r>
+                        <a:rPr lang="en-US" dirty="0"/>
+                        <a:t>Marvin</a:t>
+                      </a:r>
+                    </a:p>
+                  </a:txBody>
+                  <a:tcPr/>
+                </a:tc>
+                <a:tc>
+                  <a:txBody>
+                    <a:bodyPr/>
+                    <a:lstStyle/>
+                    <a:p>
+                      <a:pPr algn="ctr"/>
+                      <a:r>
+                        <a:rPr lang="en-US" dirty="0"/>
+                        <a:t>Robby</a:t>
+                      </a:r>
+                    </a:p>
+                  </a:txBody>
+                  <a:tcPr/>
+                </a:tc>
+                <a:tc>
+                  <a:txBody>
+                    <a:bodyPr/>
+                    <a:lstStyle/>
+                    <a:p>
+                      <a:pPr algn="ctr"/>
+                      <a:r>
+                        <a:rPr lang="en-US" dirty="0"/>
+                        <a:t>Eve</a:t>
+                      </a:r>
+                    </a:p>
+                  </a:txBody>
+                  <a:tcPr/>
+                </a:tc>
+                <a:extLst>
+                  <a:ext uri="{0D108BD9-81ED-4DB2-BD59-A6C34878D82A}">
+                    <a16:rowId xmlns:a16="http://schemas.microsoft.com/office/drawing/2014/main" val="2715914120"/>
+                  </a:ext>
+                </a:extLst>
+              </a:tr>
+            </a:tbl>
+          </a:graphicData>
+        </a:graphic>
+      </p:graphicFrame>
+      <p:cxnSp>
+        <p:nvCxnSpPr>
+          <p:cNvPr id="6" name="Straight Connector 5">
+            <a:extLst>
+              <a:ext uri="{FF2B5EF4-FFF2-40B4-BE49-F238E27FC236}">
+                <a16:creationId xmlns:a16="http://schemas.microsoft.com/office/drawing/2014/main" id="{D63FC6AD-4287-93E9-676C-1DDAE79AE88E}"/>
+              </a:ext>
+            </a:extLst>
+          </p:cNvPr>
+          <p:cNvCxnSpPr/>
+          <p:nvPr/>
+        </p:nvCxnSpPr>
+        <p:spPr>
+          <a:xfrm flipV="1">
+            <a:off x="1161826" y="1688951"/>
+            <a:ext cx="1151068" cy="892884"/>
+          </a:xfrm>
+          <a:prstGeom prst="line">
+            <a:avLst/>
+          </a:prstGeom>
+        </p:spPr>
+        <p:style>
+          <a:lnRef idx="2">
+            <a:schemeClr val="accent1"/>
+          </a:lnRef>
+          <a:fillRef idx="0">
+            <a:schemeClr val="accent1"/>
+          </a:fillRef>
+          <a:effectRef idx="1">
+            <a:schemeClr val="accent1"/>
+          </a:effectRef>
+          <a:fontRef idx="minor">
+            <a:schemeClr val="tx1"/>
+          </a:fontRef>
+        </p:style>
+      </p:cxnSp>
+    </p:spTree>
+    <p:extLst>
+      <p:ext uri="{BB962C8B-B14F-4D97-AF65-F5344CB8AC3E}">
+        <p14:creationId xmlns:p14="http://schemas.microsoft.com/office/powerpoint/2010/main" val="163140457"/>
       </p:ext>
     </p:extLst>
   </p:cSld>
